--- a/slides/decks/s25-aplastic-anaemia-ibmfs.pptx
+++ b/slides/decks/s25-aplastic-anaemia-ibmfs.pptx
@@ -135,13 +135,13 @@
   <p:extLst>
     <p:ext uri="{521415D9-36F7-43E2-AB2F-B90AF26B5E84}">
       <p14:sectionLst xmlns:p14="http://schemas.microsoft.com/office/powerpoint/2010/main">
-        <p14:section name="Opening" id="{2c448e0f-1c6a-2862-8cca-7ec43ac3c683}">
+        <p14:section name="Opening" id="{9714fec6-0b9a-957a-57c3-310f4c6e818f}">
           <p14:sldIdLst>
             <p14:sldId id="256"/>
             <p14:sldId id="257"/>
           </p14:sldIdLst>
         </p14:section>
-        <p14:section name="Aplastic anaemia and PNH" id="{3c3b97e9-1441-d28d-092d-0ae1e30650d2}">
+        <p14:section name="Aplastic anaemia and PNH" id="{ac869bb8-224a-214c-ba1f-1ac0f0fede3c}">
           <p14:sldIdLst>
             <p14:sldId id="258"/>
             <p14:sldId id="259"/>
@@ -154,7 +154,7 @@
             <p14:sldId id="266"/>
           </p14:sldIdLst>
         </p14:section>
-        <p14:section name="Inherited marrow failure" id="{35abc605-8875-1171-4490-ef2ac0f1dc46}">
+        <p14:section name="Inherited marrow failure" id="{a7b472de-07ca-6e9c-2973-30d7b0df3bfa}">
           <p14:sldIdLst>
             <p14:sldId id="267"/>
             <p14:sldId id="268"/>
@@ -163,7 +163,7 @@
             <p14:sldId id="271"/>
           </p14:sldIdLst>
         </p14:section>
-        <p14:section name="Board questions" id="{caebeb29-75b4-cbb7-cae4-d1df1894f3b0}">
+        <p14:section name="Board questions" id="{2a0dddd2-5b51-949e-5a3d-bc10cb480aeb}">
           <p14:sldIdLst>
             <p14:sldId id="272"/>
             <p14:sldId id="273"/>
@@ -173,7 +173,7 @@
             <p14:sldId id="277"/>
           </p14:sldIdLst>
         </p14:section>
-        <p14:section name="References" id="{5bf9f784-d286-dba3-0a0d-c03466ca3550}">
+        <p14:section name="References" id="{8ce43e5b-a73d-dbb6-3753-372201ba6b0e}">
           <p14:sldIdLst>
             <p14:sldId id="278"/>
             <p14:sldId id="279"/>
@@ -181,7 +181,7 @@
             <p14:sldId id="281"/>
           </p14:sldIdLst>
         </p14:section>
-        <p14:section name="Backup" id="{6b97d9d4-092f-78ca-cb48-2b27d69a0aeb}">
+        <p14:section name="Backup" id="{508ef3a6-4f5a-65d2-d071-23e827ab5147}">
           <p14:sldIdLst>
             <p14:sldId id="282"/>
             <p14:sldId id="283"/>
@@ -736,6 +736,28 @@
               <a:t>真的要移植，骨髓衰竭的病人用 SAA-like conditioning 最好；骨髓正常或高度增生的 PNH，過去用過含 busulfan 的 MAC。PNH 和 SAA 一樣不需要 GvL，GVHD 能避免就避免。</a:t>
             </a:r>
           </a:p>
+          <a:p>
+            <a:pPr>
+              <a:spcAft>
+                <a:spcPts val="600"/>
+              </a:spcAft>
+            </a:pPr>
+            <a:r>
+              <a:rPr lang="en-US" dirty="0"/>
+              <a:t>決定治療時看的是有沒有溶血的症狀和徵象，不是 clone 的大小本身。移植前一定要問血栓病史，它既是 PNH 最常見的死因，也是移植的禁忌。</a:t>
+            </a:r>
+          </a:p>
+          <a:p>
+            <a:pPr>
+              <a:spcAft>
+                <a:spcPts val="600"/>
+              </a:spcAft>
+            </a:pPr>
+            <a:r>
+              <a:rPr lang="en-US" dirty="0"/>
+              <a:t>這張的原則在第一題會用到。</a:t>
+            </a:r>
+          </a:p>
         </p:txBody>
       </p:sp>
       <p:sp>
@@ -861,6 +883,17 @@
               <a:t>Danicopan 是口服 factor D 抑制劑，做的是 add-on 的 phase 3。Iptacopan 是口服 factor B 抑制劑，phase 2 十位中有八位血紅素恢復正常。有這些藥，PNH 走到移植的機會越來越少。</a:t>
             </a:r>
           </a:p>
+          <a:p>
+            <a:pPr>
+              <a:spcAft>
+                <a:spcPts val="600"/>
+              </a:spcAft>
+            </a:pPr>
+            <a:r>
+              <a:rPr lang="en-US" dirty="0"/>
+              <a:t>Anti-C5 治療下如果仍然貧血，要想到 C3 沉積造成的 extravascular hemolysis，這是 proximal inhibitor 要解決的問題，而不是直接轉去移植。</a:t>
+            </a:r>
+          </a:p>
         </p:txBody>
       </p:sp>
       <p:sp>
@@ -997,6 +1030,17 @@
               <a:t>結果方面，EBMT 2000 到 2009 年的五年 OS，MSD 78%、MUD 65%。2022 年 ASH 報告 813 位 18 歲以下病人，五年 OS 83%，MSD 或 MUD 優於 mismatched 和 haplo。最大的分水嶺是移植原因，因 MDS 或 AML 移植的 OS 只有 40%，因骨髓衰竭移植的是 85%。</a:t>
             </a:r>
           </a:p>
+          <a:p>
+            <a:pPr>
+              <a:spcAft>
+                <a:spcPts val="600"/>
+              </a:spcAft>
+            </a:pPr>
+            <a:r>
+              <a:rPr lang="en-US" dirty="0"/>
+              <a:t>成人和 clonal disease 仍是最大挑戰，TRM 和惡性疾病復發兩者都有貢獻。</a:t>
+            </a:r>
+          </a:p>
         </p:txBody>
       </p:sp>
       <p:sp>
@@ -1111,6 +1155,17 @@
               <a:t>追蹤要定期看耳鼻喉科，檢查口腔和咽喉；女性做婦科檢查，乳癌篩檢用超音波和 MRI。內分泌也要追，包括甲狀腺、糖尿病、生長和提早停經。頭頸部和會陰部癌症風險高，所以書上強烈建議打 HPV 疫苗。病人活到成年以後，需要多專科團隊長期照顧，第 18 堂談 late effects 時會再回來。</a:t>
             </a:r>
           </a:p>
+          <a:p>
+            <a:pPr>
+              <a:spcAft>
+                <a:spcPts val="600"/>
+              </a:spcAft>
+            </a:pPr>
+            <a:r>
+              <a:rPr lang="en-US" dirty="0"/>
+              <a:t>衛教時要讓家屬知道，移植成功不代表可以停止追蹤，這些病人一輩子都要回診。</a:t>
+            </a:r>
+          </a:p>
         </p:txBody>
       </p:sp>
       <p:sp>
@@ -1254,6 +1309,17 @@
               </a:spcAft>
             </a:pPr>
             <a:r>
+              <a:rPr lang="en-US" dirty="0"/>
+              <a:t>結果方面，EBMT 最大的 SCN 系列共 136 位，五年 OS 82%，TRM 17%，十歲以下、2000 年以後和 MSD 移植的結果較好。SDS 的五年 OS 是 63.3%，TRM 19.8%。</a:t>
+            </a:r>
+          </a:p>
+          <a:p>
+            <a:pPr>
+              <a:spcAft>
+                <a:spcPts val="600"/>
+              </a:spcAft>
+            </a:pPr>
+            <a:r>
               <a:rPr lang="en-US" b="1" dirty="0"/>
               <a:t>講者提醒（不念出來）：</a:t>
             </a:r>
@@ -1394,6 +1460,17 @@
               <a:t>Dyskeratosis congenita 是 telomere disease，三聯徵是指甲營養不良、皮膚色素異常和口腔 leukoplakia。移植不做預防性，進行性骨髓衰竭、器官還沒受損時才做，用 fludarabine RIC。五年 OS 57%，十年只剩 23%，肺纖維化和肝硬化拖累長期存活。</a:t>
             </a:r>
           </a:p>
+          <a:p>
+            <a:pPr>
+              <a:spcAft>
+                <a:spcPts val="600"/>
+              </a:spcAft>
+            </a:pPr>
+            <a:r>
+              <a:rPr lang="en-US" dirty="0"/>
+              <a:t>DBA 有一個常考的陷阱，sibling 可能是 silent carrier，外表正常卻帶同樣的突變，捐贈前一定要驗。MSD 包括 cord blood，OS 超過 80%；mismatched donor 的資料很少。移植後的重點仍是鐵負荷，視程度放血或排鐵，同時注意 osteosarcoma 和大腸癌。CAMT 只有在骨髓嚴重低細胞、沒有 clonal 異常、也沒有血小板 alloimmunization 時，才考慮 RIC。</a:t>
+            </a:r>
+          </a:p>
         </p:txBody>
       </p:sp>
       <p:sp>
@@ -1519,6 +1596,17 @@
               <a:t>Conditioning 依疾病選 MAC 或 RIC，盡量不用放射線，因為這些病本來就容易長癌症；FA 和 DC 一定用 RIC。這裡和 FA 段落允許 unrelated donor 用低劑量 TBI 有點出入，實務上是把放射線降到最低。GVHD 預防用兩種免疫抑制劑，unrelated donor 再加 serotherapy。</a:t>
             </a:r>
           </a:p>
+          <a:p>
+            <a:pPr>
+              <a:spcAft>
+                <a:spcPts val="600"/>
+              </a:spcAft>
+            </a:pPr>
+            <a:r>
+              <a:rPr lang="en-US" dirty="0"/>
+              <a:t>這些原則和第 78 章的 SAA 一致。非惡性疾病的移植公式，就是合適的 donor、骨髓、足夠的細胞數，加上溫和的 conditioning。</a:t>
+            </a:r>
+          </a:p>
         </p:txBody>
       </p:sp>
       <p:sp>
@@ -1640,6 +1728,28 @@
               </a:spcAft>
             </a:pPr>
             <a:r>
+              <a:rPr lang="en-US" dirty="0"/>
+              <a:t>選項有 IST 三合一、骨髓移植、周邊血 MAC 移植、eculizumab，以及單用 eltrombopag。</a:t>
+            </a:r>
+          </a:p>
+          <a:p>
+            <a:pPr>
+              <a:spcAft>
+                <a:spcPts val="600"/>
+              </a:spcAft>
+            </a:pPr>
+            <a:r>
+              <a:rPr lang="en-US" dirty="0"/>
+              <a:t>這題的數字刻意放得很典型，重點在後面的決策。</a:t>
+            </a:r>
+          </a:p>
+          <a:p>
+            <a:pPr>
+              <a:spcAft>
+                <a:spcPts val="600"/>
+              </a:spcAft>
+            </a:pPr>
+            <a:r>
               <a:rPr lang="en-US" b="1" dirty="0"/>
               <a:t>[Pause for answers.]</a:t>
             </a:r>
@@ -1758,6 +1868,17 @@
               <a:t>最常被選的是 A。ATG 加 CSA 加 eltrombopag 確實是新標準，但對象是沒有 sibling 或 40 歲以上的病人。C 錯在幹細胞來源和強度，SAA 用骨髓、用含 ATG 的 conditioning。D 也不對，沒有溶血時 PNH clone 不改變 SAA 的流程。Breakage test 陰性這個細節，是在提醒先排除 Fanconi anemia。</a:t>
             </a:r>
           </a:p>
+          <a:p>
+            <a:pPr>
+              <a:spcAft>
+                <a:spcPts val="600"/>
+              </a:spcAft>
+            </a:pPr>
+            <a:r>
+              <a:rPr lang="en-US" dirty="0"/>
+              <a:t>實務上，診斷一確立就要同時安排 sibling HLA typing，不要等 IST 失敗才想到移植。</a:t>
+            </a:r>
+          </a:p>
         </p:txBody>
       </p:sp>
       <p:sp>
@@ -1879,6 +2000,28 @@
               </a:spcAft>
             </a:pPr>
             <a:r>
+              <a:rPr lang="en-US" dirty="0"/>
+              <a:t>選項包括周邊血加 PTCy、busulfan MAC、nonmyeloablative 加 ATG 和 PTCy、拿掉 ATG 的骨髓移植，以及等到 clonal evolution 再移植。</a:t>
+            </a:r>
+          </a:p>
+          <a:p>
+            <a:pPr>
+              <a:spcAft>
+                <a:spcPts val="600"/>
+              </a:spcAft>
+            </a:pPr>
+            <a:r>
+              <a:rPr lang="en-US" dirty="0"/>
+              <a:t>她已經走完第一線 IST，現在是第二線。</a:t>
+            </a:r>
+          </a:p>
+          <a:p>
+            <a:pPr>
+              <a:spcAft>
+                <a:spcPts val="600"/>
+              </a:spcAft>
+            </a:pPr>
+            <a:r>
               <a:rPr lang="en-US" b="1" dirty="0"/>
               <a:t>[Pause for answers.]</a:t>
             </a:r>
@@ -2008,6 +2151,17 @@
               <a:t>第三段換到遺傳性骨髓衰竭，Fanconi anemia 講得最細，再把 SCN、Shwachman-Diamond、Diamond-Blackfan、CAMT 和 dyskeratosis congenita 並排比較，最後收在 EBMT 的共通原則。三題練習放在最後，每題都對應前面某一張投影片。</a:t>
             </a:r>
           </a:p>
+          <a:p>
+            <a:pPr>
+              <a:spcAft>
+                <a:spcPts val="600"/>
+              </a:spcAft>
+            </a:pPr>
+            <a:r>
+              <a:rPr lang="en-US" dirty="0"/>
+              <a:t>後天和遺傳性骨髓衰竭在門診看起來可能一模一樣，所以第一段的診斷排除，會一路連到第三段的 conditioning 選擇。</a:t>
+            </a:r>
+          </a:p>
         </p:txBody>
       </p:sp>
       <p:sp>
@@ -2122,6 +2276,17 @@
               <a:t>最容易被選的是 A。周邊血細胞多、engraftment 快，但 GVHD 較多，在不需要 GvL 的 SAA 只有壞處，所以建議用骨髓。D 把 ATG 拿掉，正好丟掉讓結果改善的那一步。B 的 MAC 增加毒性卻沒有好處。E 等 clonal evolution 才移植，是拖延。</a:t>
             </a:r>
           </a:p>
+          <a:p>
+            <a:pPr>
+              <a:spcAft>
+                <a:spcPts val="600"/>
+              </a:spcAft>
+            </a:pPr>
+            <a:r>
+              <a:rPr lang="en-US" dirty="0"/>
+              <a:t>這些 haplo 的數字都來自骨髓移植，題目換成周邊血，就要想到 GVHD 會增加。</a:t>
+            </a:r>
+          </a:p>
         </p:txBody>
       </p:sp>
       <p:sp>
@@ -2243,6 +2408,28 @@
               </a:spcAft>
             </a:pPr>
             <a:r>
+              <a:rPr lang="en-US" dirty="0"/>
+              <a:t>選項有 busulfan 加 cyclophosphamide、後天 SAA 的標準方案、fludarabine 為主的減量方案、TBI 12 Gy，以及 fludarabine 加 cytarabine 減積。</a:t>
+            </a:r>
+          </a:p>
+          <a:p>
+            <a:pPr>
+              <a:spcAft>
+                <a:spcPts val="600"/>
+              </a:spcAft>
+            </a:pPr>
+            <a:r>
+              <a:rPr lang="en-US" dirty="0"/>
+              <a:t>FA 的診斷已經確立，問的是怎麼移植。</a:t>
+            </a:r>
+          </a:p>
+          <a:p>
+            <a:pPr>
+              <a:spcAft>
+                <a:spcPts val="600"/>
+              </a:spcAft>
+            </a:pPr>
+            <a:r>
               <a:rPr lang="en-US" b="1" dirty="0"/>
               <a:t>[Pause for answers.]</a:t>
             </a:r>
@@ -2361,6 +2548,17 @@
               <a:t>最容易選錯的是 B。把 FA 當成後天 SAA，用標準 SAA conditioning，Ch. 78 明講結果很差。A 和 D 是標準 MAC，對 FA 毒性太大。E 的減積只給 MDS with excess blasts 或 AML。姊姊的 breakage test 正常，也呼應 donor 要先驗基因缺陷的原則。</a:t>
             </a:r>
           </a:p>
+          <a:p>
+            <a:pPr>
+              <a:spcAft>
+                <a:spcPts val="600"/>
+              </a:spcAft>
+            </a:pPr>
+            <a:r>
+              <a:rPr lang="en-US" dirty="0"/>
+              <a:t>移植之後，還要接上頭頸癌和婦科癌症的篩檢，以及 HPV 疫苗。</a:t>
+            </a:r>
+          </a:p>
         </p:txBody>
       </p:sp>
       <p:sp>
@@ -3282,6 +3480,17 @@
               <a:t>背後的邏輯是 SAA 不需要 GvL，移植的好處完全來自換掉被免疫攻擊的骨髓。年紀越輕、donor 越好，移植的優勢就越明顯；40 歲以上移植毒性和 GVHD 上升，IST 就排到前面。</a:t>
             </a:r>
           </a:p>
+          <a:p>
+            <a:pPr>
+              <a:spcAft>
+                <a:spcPts val="600"/>
+              </a:spcAft>
+            </a:pPr>
+            <a:r>
+              <a:rPr lang="en-US" dirty="0"/>
+              <a:t>這張圖的分界都是年齡，40 歲和 20 歲，第二線還會出現 30 歲，三個數字不要混在一起。</a:t>
+            </a:r>
+          </a:p>
         </p:txBody>
       </p:sp>
       <p:sp>
@@ -3418,6 +3627,17 @@
               <a:t>限制在 40 歲以上和 comorbidity index 高的病人，移植毒性和 GVHD 都上升，這就是第一線流程用 40 歲當分界的原因。</a:t>
             </a:r>
           </a:p>
+          <a:p>
+            <a:pPr>
+              <a:spcAft>
+                <a:spcPts val="600"/>
+              </a:spcAft>
+            </a:pPr>
+            <a:r>
+              <a:rPr lang="en-US" dirty="0"/>
+              <a:t>這裡的 ATG 和 IST 裡的 ATG 角色不同。IST 靠它壓住攻擊骨髓的 T 細胞，讓病人自己的造血恢復；conditioning 裡則是清掉受者的 T 細胞，讓 donor 骨髓長得上來。題目如果問 SAA 移植為什麼 graft failure 的風險比較高，答案就是這個免疫媒介的病理。</a:t>
+            </a:r>
+          </a:p>
         </p:txBody>
       </p:sp>
       <p:sp>
@@ -3561,6 +3781,17 @@
               </a:spcAft>
             </a:pPr>
             <a:r>
+              <a:rPr lang="en-US" dirty="0"/>
+              <a:t>兩個研究的數字不要直接相比，一個是單臂 cohort，一個是隨機對照，考題引用時看清楚是哪一個。</a:t>
+            </a:r>
+          </a:p>
+          <a:p>
+            <a:pPr>
+              <a:spcAft>
+                <a:spcPts val="600"/>
+              </a:spcAft>
+            </a:pPr>
+            <a:r>
               <a:rPr lang="en-US" b="1" dirty="0"/>
               <a:t>講者提醒（不念出來）：</a:t>
             </a:r>
@@ -3712,6 +3943,28 @@
               <a:t>所以書上的條件是 10/10 MUD、年輕、而且診斷後兩到三個月內能完成移植。台灣找 unrelated donor 的時間如果拖太久，這條路就不成立，要回到 IST。</a:t>
             </a:r>
           </a:p>
+          <a:p>
+            <a:pPr>
+              <a:spcAft>
+                <a:spcPts val="600"/>
+              </a:spcAft>
+            </a:pPr>
+            <a:r>
+              <a:rPr lang="en-US" dirty="0"/>
+              <a:t>FCC 裡的 Campath 就是 alemtuzumab，和 sibling 移植用 ATG 的邏輯一樣，都是 T-cell directed serotherapy，同時防 rejection 和 GVHD。</a:t>
+            </a:r>
+          </a:p>
+          <a:p>
+            <a:pPr>
+              <a:spcAft>
+                <a:spcPts val="600"/>
+              </a:spcAft>
+            </a:pPr>
+            <a:r>
+              <a:rPr lang="en-US" dirty="0"/>
+              <a:t>這也是第一線流程中間那條路的根據。</a:t>
+            </a:r>
+          </a:p>
         </p:txBody>
       </p:sp>
       <p:sp>
@@ -3848,6 +4101,28 @@
               <a:t>不走移植的病人，單用 eltrombopag 在 refractory SAA 的 ORR 約 40%，有些是三系反應，即使第一線已經用過也可能有效。另外是再一次 IST，androgen 最近也重新被檢視。</a:t>
             </a:r>
           </a:p>
+          <a:p>
+            <a:pPr>
+              <a:spcAft>
+                <a:spcPts val="600"/>
+              </a:spcAft>
+            </a:pPr>
+            <a:r>
+              <a:rPr lang="en-US" dirty="0"/>
+              <a:t>IST 失敗以後才移植，診斷到移植的時間通常已經拉長，而一年內移植正是有利因素。所以 IST 一開始就要同步找 donor，不要等到確定 refractory 才開始搜尋。</a:t>
+            </a:r>
+          </a:p>
+          <a:p>
+            <a:pPr>
+              <a:spcAft>
+                <a:spcPts val="600"/>
+              </a:spcAft>
+            </a:pPr>
+            <a:r>
+              <a:rPr lang="en-US" dirty="0"/>
+              <a:t>這張圖也是第二題的背景。</a:t>
+            </a:r>
+          </a:p>
         </p:txBody>
       </p:sp>
       <p:sp>
@@ -3971,6 +4246,17 @@
             <a:r>
               <a:rPr lang="en-US" dirty="0"/>
               <a:t>EBMT 36 位、中位年齡 42 歲的病人，一年 OS 78%，用 Baltimore-like protocol 的達 93%。DeZern 2023 把 haplo 移到第一線，27 位病人三年 OS 92%，grade II–IV aGVHD 7%，cGVHD 4%，TBI 400 cGy 那一組 OS 和 GRFS 都是 100%。美國作者因此提議年輕病人第一線就做。</a:t>
+            </a:r>
+          </a:p>
+          <a:p>
+            <a:pPr>
+              <a:spcAft>
+                <a:spcPts val="600"/>
+              </a:spcAft>
+            </a:pPr>
+            <a:r>
+              <a:rPr lang="en-US" dirty="0"/>
+              <a:t>Ideal body weight 這個細節要注意，算細胞數時不是用實際體重。另外這些 haplo 資料大多來自年輕病人，年紀和 comorbidity 仍是 alternative donor 移植最先要過的門檻。</a:t>
             </a:r>
           </a:p>
         </p:txBody>

--- a/slides/decks/s25-aplastic-anaemia-ibmfs.pptx
+++ b/slides/decks/s25-aplastic-anaemia-ibmfs.pptx
@@ -32,11 +32,9 @@
     <p:sldId id="280" r:id="rId26"/>
     <p:sldId id="281" r:id="rId27"/>
     <p:sldId id="282" r:id="rId28"/>
-    <p:sldId id="283" r:id="rId29"/>
-    <p:sldId id="284" r:id="rId30"/>
   </p:sldIdLst>
   <p:notesMasterIdLst>
-    <p:notesMasterId r:id="rId31"/>
+    <p:notesMasterId r:id="rId29"/>
   </p:notesMasterIdLst>
   <p:sldSz cx="12192000" cy="6858000"/>
   <p:notesSz cx="6858000" cy="12192000"/>
@@ -135,13 +133,13 @@
   <p:extLst>
     <p:ext uri="{521415D9-36F7-43E2-AB2F-B90AF26B5E84}">
       <p14:sectionLst xmlns:p14="http://schemas.microsoft.com/office/powerpoint/2010/main">
-        <p14:section name="Opening" id="{9714fec6-0b9a-957a-57c3-310f4c6e818f}">
+        <p14:section name="Opening" id="{01c96755-5fa0-8026-abeb-da5b4168d3a8}">
           <p14:sldIdLst>
             <p14:sldId id="256"/>
             <p14:sldId id="257"/>
           </p14:sldIdLst>
         </p14:section>
-        <p14:section name="Aplastic anaemia and PNH" id="{ac869bb8-224a-214c-ba1f-1ac0f0fede3c}">
+        <p14:section name="Aplastic anaemia and PNH" id="{cbcd7406-fa67-86cb-6a62-7e95cbef7159}">
           <p14:sldIdLst>
             <p14:sldId id="258"/>
             <p14:sldId id="259"/>
@@ -154,7 +152,7 @@
             <p14:sldId id="266"/>
           </p14:sldIdLst>
         </p14:section>
-        <p14:section name="Inherited marrow failure" id="{a7b472de-07ca-6e9c-2973-30d7b0df3bfa}">
+        <p14:section name="Inherited marrow failure" id="{7c95ec64-1713-42aa-bf5e-0a83f885401a}">
           <p14:sldIdLst>
             <p14:sldId id="267"/>
             <p14:sldId id="268"/>
@@ -163,7 +161,7 @@
             <p14:sldId id="271"/>
           </p14:sldIdLst>
         </p14:section>
-        <p14:section name="Board questions" id="{2a0dddd2-5b51-949e-5a3d-bc10cb480aeb}">
+        <p14:section name="Board questions" id="{727ab6d9-15ae-bf40-a641-b9421f57115f}">
           <p14:sldIdLst>
             <p14:sldId id="272"/>
             <p14:sldId id="273"/>
@@ -173,19 +171,17 @@
             <p14:sldId id="277"/>
           </p14:sldIdLst>
         </p14:section>
-        <p14:section name="References" id="{8ce43e5b-a73d-dbb6-3753-372201ba6b0e}">
+        <p14:section name="References" id="{f4d0f43d-dcb0-32b6-8905-99811e0b68f5}">
           <p14:sldIdLst>
             <p14:sldId id="278"/>
             <p14:sldId id="279"/>
+          </p14:sldIdLst>
+        </p14:section>
+        <p14:section name="Backup" id="{8bde8198-4f35-d4d8-311a-d9d7fdf58f95}">
+          <p14:sldIdLst>
             <p14:sldId id="280"/>
             <p14:sldId id="281"/>
-          </p14:sldIdLst>
-        </p14:section>
-        <p14:section name="Backup" id="{508ef3a6-4f5a-65d2-d071-23e827ab5147}">
-          <p14:sldIdLst>
             <p14:sldId id="282"/>
-            <p14:sldId id="283"/>
-            <p14:sldId id="284"/>
           </p14:sldIdLst>
         </p14:section>
       </p14:sectionLst>
@@ -2819,7 +2815,7 @@
           <a:p>
             <a:r>
               <a:rPr lang="en-US" dirty="0"/>
-              <a:t>各頁頁尾短式引用的完整文獻，不講。</a:t>
+              <a:t>這是第 78 章的原圖，主線的兩張樹狀圖就是由它拆出來的。注意右下角，年輕、10/10、診斷一年內的條件不符時，才走 eltrombopag、再一次 IST 或 mismatched 移植。</a:t>
             </a:r>
             <a:endParaRPr lang="en-US" dirty="0"/>
           </a:p>
@@ -2907,7 +2903,7 @@
           <a:p>
             <a:r>
               <a:rPr lang="en-US" dirty="0"/>
-              <a:t>各頁頁尾短式引用的完整文獻，不講。</a:t>
+              <a:t>這是 EBMT 的 FA 移植資料。兩條曲線在十年後都明顯往上，續發癌症沒有平台期，所以追蹤必須終身。</a:t>
             </a:r>
             <a:endParaRPr lang="en-US" dirty="0"/>
           </a:p>
@@ -2995,7 +2991,7 @@
           <a:p>
             <a:r>
               <a:rPr lang="en-US" dirty="0"/>
-              <a:t>這是第 78 章的原圖，主線的兩張樹狀圖就是由它拆出來的。注意右下角，年輕、10/10、診斷一年內的條件不符時，才走 eltrombopag、再一次 IST 或 mismatched 移植。</a:t>
+              <a:t>這張是我把兩章的移植物規則整理在一起。不論後天或遺傳性骨髓衰竭，都偏好骨髓，因為 GVHD 較少；細胞數門檻骨髓是 10 的 8 次方，cord blood 是 10 的 7 次方。</a:t>
             </a:r>
             <a:endParaRPr lang="en-US" dirty="0"/>
           </a:p>
@@ -3019,182 +3015,6 @@
             <a:fld id="{F7021451-1387-4CA6-816F-3879F97B5CBC}" type="slidenum">
               <a:rPr lang="en-US"/>
               <a:t>27</a:t>
-            </a:fld>
-            <a:endParaRPr lang="en-US"/>
-          </a:p>
-        </p:txBody>
-      </p:sp>
-    </p:spTree>
-    <p:extLst>
-      <p:ext uri="{BB962C8B-B14F-4D97-AF65-F5344CB8AC3E}">
-        <p14:creationId xmlns:p14="http://schemas.microsoft.com/office/powerpoint/2010/main" val="1024086991"/>
-      </p:ext>
-    </p:extLst>
-  </p:cSld>
-  <p:clrMapOvr>
-    <a:masterClrMapping/>
-  </p:clrMapOvr>
-</p:notes>
-</file>
-
-<file path=ppt/notesSlides/notesSlide28.xml><?xml version="1.0" encoding="utf-8"?>
-<p:notes xmlns:a="http://schemas.openxmlformats.org/drawingml/2006/main" xmlns:r="http://schemas.openxmlformats.org/officeDocument/2006/relationships" xmlns:p="http://schemas.openxmlformats.org/presentationml/2006/main">
-  <p:cSld>
-    <p:spTree>
-      <p:nvGrpSpPr>
-        <p:cNvPr id="1" name=""/>
-        <p:cNvGrpSpPr/>
-        <p:nvPr/>
-      </p:nvGrpSpPr>
-      <p:grpSpPr>
-        <a:xfrm>
-          <a:off x="0" y="0"/>
-          <a:ext cx="0" cy="0"/>
-          <a:chOff x="0" y="0"/>
-          <a:chExt cx="0" cy="0"/>
-        </a:xfrm>
-      </p:grpSpPr>
-      <p:sp>
-        <p:nvSpPr>
-          <p:cNvPr id="2" name="Slide Image Placeholder 1"/>
-          <p:cNvSpPr>
-            <a:spLocks noGrp="1" noRot="1" noChangeAspect="1"/>
-          </p:cNvSpPr>
-          <p:nvPr>
-            <p:ph type="sldImg"/>
-          </p:nvPr>
-        </p:nvSpPr>
-        <p:spPr/>
-      </p:sp>
-      <p:sp>
-        <p:nvSpPr>
-          <p:cNvPr id="3" name="Notes Placeholder 2"/>
-          <p:cNvSpPr>
-            <a:spLocks noGrp="1"/>
-          </p:cNvSpPr>
-          <p:nvPr>
-            <p:ph type="body" idx="1"/>
-          </p:nvPr>
-        </p:nvSpPr>
-        <p:spPr/>
-        <p:txBody>
-          <a:bodyPr/>
-          <a:lstStyle/>
-          <a:p>
-            <a:r>
-              <a:rPr lang="en-US" dirty="0"/>
-              <a:t>這是 EBMT 的 FA 移植資料。兩條曲線在十年後都明顯往上，續發癌症沒有平台期，所以追蹤必須終身。</a:t>
-            </a:r>
-            <a:endParaRPr lang="en-US" dirty="0"/>
-          </a:p>
-        </p:txBody>
-      </p:sp>
-      <p:sp>
-        <p:nvSpPr>
-          <p:cNvPr id="4" name="Slide Number Placeholder 3"/>
-          <p:cNvSpPr>
-            <a:spLocks noGrp="1"/>
-          </p:cNvSpPr>
-          <p:nvPr>
-            <p:ph type="sldNum" sz="quarter" idx="10"/>
-          </p:nvPr>
-        </p:nvSpPr>
-        <p:spPr/>
-        <p:txBody>
-          <a:bodyPr/>
-          <a:lstStyle/>
-          <a:p>
-            <a:fld id="{F7021451-1387-4CA6-816F-3879F97B5CBC}" type="slidenum">
-              <a:rPr lang="en-US"/>
-              <a:t>28</a:t>
-            </a:fld>
-            <a:endParaRPr lang="en-US"/>
-          </a:p>
-        </p:txBody>
-      </p:sp>
-    </p:spTree>
-    <p:extLst>
-      <p:ext uri="{BB962C8B-B14F-4D97-AF65-F5344CB8AC3E}">
-        <p14:creationId xmlns:p14="http://schemas.microsoft.com/office/powerpoint/2010/main" val="1024086991"/>
-      </p:ext>
-    </p:extLst>
-  </p:cSld>
-  <p:clrMapOvr>
-    <a:masterClrMapping/>
-  </p:clrMapOvr>
-</p:notes>
-</file>
-
-<file path=ppt/notesSlides/notesSlide29.xml><?xml version="1.0" encoding="utf-8"?>
-<p:notes xmlns:a="http://schemas.openxmlformats.org/drawingml/2006/main" xmlns:r="http://schemas.openxmlformats.org/officeDocument/2006/relationships" xmlns:p="http://schemas.openxmlformats.org/presentationml/2006/main">
-  <p:cSld>
-    <p:spTree>
-      <p:nvGrpSpPr>
-        <p:cNvPr id="1" name=""/>
-        <p:cNvGrpSpPr/>
-        <p:nvPr/>
-      </p:nvGrpSpPr>
-      <p:grpSpPr>
-        <a:xfrm>
-          <a:off x="0" y="0"/>
-          <a:ext cx="0" cy="0"/>
-          <a:chOff x="0" y="0"/>
-          <a:chExt cx="0" cy="0"/>
-        </a:xfrm>
-      </p:grpSpPr>
-      <p:sp>
-        <p:nvSpPr>
-          <p:cNvPr id="2" name="Slide Image Placeholder 1"/>
-          <p:cNvSpPr>
-            <a:spLocks noGrp="1" noRot="1" noChangeAspect="1"/>
-          </p:cNvSpPr>
-          <p:nvPr>
-            <p:ph type="sldImg"/>
-          </p:nvPr>
-        </p:nvSpPr>
-        <p:spPr/>
-      </p:sp>
-      <p:sp>
-        <p:nvSpPr>
-          <p:cNvPr id="3" name="Notes Placeholder 2"/>
-          <p:cNvSpPr>
-            <a:spLocks noGrp="1"/>
-          </p:cNvSpPr>
-          <p:nvPr>
-            <p:ph type="body" idx="1"/>
-          </p:nvPr>
-        </p:nvSpPr>
-        <p:spPr/>
-        <p:txBody>
-          <a:bodyPr/>
-          <a:lstStyle/>
-          <a:p>
-            <a:r>
-              <a:rPr lang="en-US" dirty="0"/>
-              <a:t>這張是我把兩章的移植物規則整理在一起。不論後天或遺傳性骨髓衰竭，都偏好骨髓，因為 GVHD 較少；細胞數門檻骨髓是 10 的 8 次方，cord blood 是 10 的 7 次方。</a:t>
-            </a:r>
-            <a:endParaRPr lang="en-US" dirty="0"/>
-          </a:p>
-        </p:txBody>
-      </p:sp>
-      <p:sp>
-        <p:nvSpPr>
-          <p:cNvPr id="4" name="Slide Number Placeholder 3"/>
-          <p:cNvSpPr>
-            <a:spLocks noGrp="1"/>
-          </p:cNvSpPr>
-          <p:nvPr>
-            <p:ph type="sldNum" sz="quarter" idx="10"/>
-          </p:nvPr>
-        </p:nvSpPr>
-        <p:spPr/>
-        <p:txBody>
-          <a:bodyPr/>
-          <a:lstStyle/>
-          <a:p>
-            <a:fld id="{F7021451-1387-4CA6-816F-3879F97B5CBC}" type="slidenum">
-              <a:rPr lang="en-US"/>
-              <a:t>29</a:t>
             </a:fld>
             <a:endParaRPr lang="en-US"/>
           </a:p>
@@ -5654,7 +5474,7 @@
       </p:sp>
       <p:graphicFrame>
         <p:nvGraphicFramePr>
-          <p:cNvPr id="11" name="Table 50"/>
+          <p:cNvPr id="11" name="Table 49"/>
           <p:cNvGraphicFramePr>
             <a:graphicFrameLocks noGrp="1"/>
           </p:cNvGraphicFramePr>
@@ -6618,7 +6438,7 @@
       </p:sp>
       <p:graphicFrame>
         <p:nvGraphicFramePr>
-          <p:cNvPr id="12" name="Table 51"/>
+          <p:cNvPr id="12" name="Table 50"/>
           <p:cNvGraphicFramePr>
             <a:graphicFrameLocks noGrp="1"/>
           </p:cNvGraphicFramePr>
@@ -7591,42 +7411,6 @@
       </p:graphicFrame>
       <p:sp>
         <p:nvSpPr>
-          <p:cNvPr id="7" name="Text 52"/>
-          <p:cNvSpPr txBox="1"/>
-          <p:nvPr/>
-        </p:nvSpPr>
-        <p:spPr>
-          <a:xfrm>
-            <a:off x="685800" y="5440680"/>
-            <a:ext cx="10817352" cy="411480"/>
-          </a:xfrm>
-          <a:prstGeom prst="rect">
-            <a:avLst/>
-          </a:prstGeom>
-          <a:noFill/>
-          <a:ln/>
-        </p:spPr>
-        <p:txBody>
-          <a:bodyPr wrap="square" lIns="0" tIns="0" rIns="0" bIns="0" rtlCol="0" anchor="t"/>
-          <a:lstStyle/>
-          <a:p>
-            <a:pPr indent="0" marL="0">
-              <a:buNone/>
-            </a:pPr>
-            <a:r>
-              <a:rPr lang="en-US" sz="1600" b="1" dirty="0">
-                <a:solidFill>
-                  <a:schemeClr val="tx1"/>
-                </a:solidFill>
-              </a:rPr>
-              <a:t>C3, factor D and factor B inhibitors target extravascular haemolysis left on anti-C5</a:t>
-            </a:r>
-            <a:endParaRPr lang="en-US" sz="1600" dirty="0"/>
-          </a:p>
-        </p:txBody>
-      </p:sp>
-      <p:sp>
-        <p:nvSpPr>
           <p:cNvPr id="25" name="Slide Number Placeholder 0"/>
           <p:cNvSpPr>
             <a:spLocks noGrp="1"/>
@@ -7811,7 +7595,7 @@
       </p:sp>
       <p:graphicFrame>
         <p:nvGraphicFramePr>
-          <p:cNvPr id="13" name="Table 53"/>
+          <p:cNvPr id="13" name="Table 51"/>
           <p:cNvGraphicFramePr>
             <a:graphicFrameLocks noGrp="1"/>
           </p:cNvGraphicFramePr>
@@ -8775,7 +8559,7 @@
       </p:sp>
       <p:sp>
         <p:nvSpPr>
-          <p:cNvPr id="6" name="Box 54"/>
+          <p:cNvPr id="6" name="Box 52"/>
           <p:cNvSpPr txBox="1"/>
           <p:nvPr/>
         </p:nvSpPr>
@@ -8841,7 +8625,7 @@
       </p:sp>
       <p:sp>
         <p:nvSpPr>
-          <p:cNvPr id="8" name="Box 55"/>
+          <p:cNvPr id="8" name="Box 53"/>
           <p:cNvSpPr txBox="1"/>
           <p:nvPr/>
         </p:nvSpPr>
@@ -8907,7 +8691,7 @@
       </p:sp>
       <p:sp>
         <p:nvSpPr>
-          <p:cNvPr id="10" name="Box 56"/>
+          <p:cNvPr id="10" name="Box 54"/>
           <p:cNvSpPr txBox="1"/>
           <p:nvPr/>
         </p:nvSpPr>
@@ -8973,7 +8757,7 @@
       </p:sp>
       <p:sp>
         <p:nvSpPr>
-          <p:cNvPr id="12" name="Box 57"/>
+          <p:cNvPr id="12" name="Box 55"/>
           <p:cNvSpPr txBox="1"/>
           <p:nvPr/>
         </p:nvSpPr>
@@ -9015,7 +8799,7 @@
       </p:sp>
       <p:sp>
         <p:nvSpPr>
-          <p:cNvPr id="13" name="Text 58"/>
+          <p:cNvPr id="13" name="Text 56"/>
           <p:cNvSpPr txBox="1"/>
           <p:nvPr/>
         </p:nvSpPr>
@@ -9235,7 +9019,7 @@
       </p:sp>
       <p:graphicFrame>
         <p:nvGraphicFramePr>
-          <p:cNvPr id="15" name="Table 59"/>
+          <p:cNvPr id="15" name="Table 57"/>
           <p:cNvGraphicFramePr>
             <a:graphicFrameLocks noGrp="1"/>
           </p:cNvGraphicFramePr>
@@ -10514,7 +10298,7 @@
       </p:sp>
       <p:graphicFrame>
         <p:nvGraphicFramePr>
-          <p:cNvPr id="16" name="Table 60"/>
+          <p:cNvPr id="16" name="Table 58"/>
           <p:cNvGraphicFramePr>
             <a:graphicFrameLocks noGrp="1"/>
           </p:cNvGraphicFramePr>
@@ -12056,7 +11840,7 @@
       </p:sp>
       <p:graphicFrame>
         <p:nvGraphicFramePr>
-          <p:cNvPr id="17" name="Table 61"/>
+          <p:cNvPr id="17" name="Table 59"/>
           <p:cNvGraphicFramePr>
             <a:graphicFrameLocks noGrp="1"/>
           </p:cNvGraphicFramePr>
@@ -12938,7 +12722,7 @@
       </p:sp>
       <p:sp>
         <p:nvSpPr>
-          <p:cNvPr id="6" name="Text 62"/>
+          <p:cNvPr id="6" name="Text 60"/>
           <p:cNvSpPr txBox="1"/>
           <p:nvPr/>
         </p:nvSpPr>
@@ -12974,7 +12758,7 @@
       </p:sp>
       <p:sp>
         <p:nvSpPr>
-          <p:cNvPr id="7" name="Text 63"/>
+          <p:cNvPr id="7" name="Text 61"/>
           <p:cNvSpPr txBox="1"/>
           <p:nvPr/>
         </p:nvSpPr>
@@ -13265,7 +13049,7 @@
       </p:sp>
       <p:sp>
         <p:nvSpPr>
-          <p:cNvPr id="6" name="Box 64"/>
+          <p:cNvPr id="6" name="Box 62"/>
           <p:cNvSpPr txBox="1"/>
           <p:nvPr/>
         </p:nvSpPr>
@@ -13307,7 +13091,7 @@
       </p:sp>
       <p:sp>
         <p:nvSpPr>
-          <p:cNvPr id="7" name="Text 65"/>
+          <p:cNvPr id="7" name="Text 63"/>
           <p:cNvSpPr txBox="1"/>
           <p:nvPr/>
         </p:nvSpPr>
@@ -13527,7 +13311,7 @@
       </p:sp>
       <p:sp>
         <p:nvSpPr>
-          <p:cNvPr id="6" name="Text 66"/>
+          <p:cNvPr id="6" name="Text 64"/>
           <p:cNvSpPr txBox="1"/>
           <p:nvPr/>
         </p:nvSpPr>
@@ -13563,7 +13347,7 @@
       </p:sp>
       <p:sp>
         <p:nvSpPr>
-          <p:cNvPr id="7" name="Text 67"/>
+          <p:cNvPr id="7" name="Text 65"/>
           <p:cNvSpPr txBox="1"/>
           <p:nvPr/>
         </p:nvSpPr>
@@ -14695,7 +14479,7 @@
       </p:sp>
       <p:sp>
         <p:nvSpPr>
-          <p:cNvPr id="6" name="Box 68"/>
+          <p:cNvPr id="6" name="Box 66"/>
           <p:cNvSpPr txBox="1"/>
           <p:nvPr/>
         </p:nvSpPr>
@@ -14737,7 +14521,7 @@
       </p:sp>
       <p:sp>
         <p:nvSpPr>
-          <p:cNvPr id="7" name="Text 69"/>
+          <p:cNvPr id="7" name="Text 67"/>
           <p:cNvSpPr txBox="1"/>
           <p:nvPr/>
         </p:nvSpPr>
@@ -14957,7 +14741,7 @@
       </p:sp>
       <p:sp>
         <p:nvSpPr>
-          <p:cNvPr id="6" name="Text 70"/>
+          <p:cNvPr id="6" name="Text 68"/>
           <p:cNvSpPr txBox="1"/>
           <p:nvPr/>
         </p:nvSpPr>
@@ -14993,7 +14777,7 @@
       </p:sp>
       <p:sp>
         <p:nvSpPr>
-          <p:cNvPr id="7" name="Text 71"/>
+          <p:cNvPr id="7" name="Text 69"/>
           <p:cNvSpPr txBox="1"/>
           <p:nvPr/>
         </p:nvSpPr>
@@ -15284,7 +15068,7 @@
       </p:sp>
       <p:sp>
         <p:nvSpPr>
-          <p:cNvPr id="6" name="Box 72"/>
+          <p:cNvPr id="6" name="Box 70"/>
           <p:cNvSpPr txBox="1"/>
           <p:nvPr/>
         </p:nvSpPr>
@@ -15326,7 +15110,7 @@
       </p:sp>
       <p:sp>
         <p:nvSpPr>
-          <p:cNvPr id="7" name="Text 73"/>
+          <p:cNvPr id="7" name="Text 71"/>
           <p:cNvSpPr txBox="1"/>
           <p:nvPr/>
         </p:nvSpPr>
@@ -15500,7 +15284,7 @@
                   <a:schemeClr val="tx1"/>
                 </a:solidFill>
               </a:rPr>
-              <a:t>References, part 1 of 4</a:t>
+              <a:t>References, part 1 of 2</a:t>
             </a:r>
             <a:endParaRPr lang="en-US" sz="3600" dirty="0"/>
           </a:p>
@@ -15508,7 +15292,7 @@
       </p:sp>
       <p:sp>
         <p:nvSpPr>
-          <p:cNvPr id="5" name="Text 74"/>
+          <p:cNvPr id="5" name="Text 72"/>
           <p:cNvSpPr txBox="1"/>
           <p:nvPr/>
         </p:nvSpPr>
@@ -15594,11 +15378,45 @@
             </a:r>
             <a:endParaRPr lang="en-US" sz="1100" dirty="0"/>
           </a:p>
+          <a:p>
+            <a:pPr indent="0" marL="0">
+              <a:spcAft>
+                <a:spcPts val="700"/>
+              </a:spcAft>
+              <a:buNone/>
+            </a:pPr>
+            <a:r>
+              <a:rPr lang="en-US" sz="1100" dirty="0">
+                <a:solidFill>
+                  <a:schemeClr val="tx1"/>
+                </a:solidFill>
+              </a:rPr>
+              <a:t>5. Marsh JC, Gupta V, Lim Z, et al. Alemtuzumab with fludarabine and cyclophosphamide reduces chronic graft-versus-host disease after allogeneic stem cell transplantation for acquired aplastic anemia. Blood. 2011;118(8):2351–7.</a:t>
+            </a:r>
+            <a:endParaRPr lang="en-US" sz="1100" dirty="0"/>
+          </a:p>
+          <a:p>
+            <a:pPr indent="0" marL="0">
+              <a:spcAft>
+                <a:spcPts val="700"/>
+              </a:spcAft>
+              <a:buNone/>
+            </a:pPr>
+            <a:r>
+              <a:rPr lang="en-US" sz="1100" dirty="0">
+                <a:solidFill>
+                  <a:schemeClr val="tx1"/>
+                </a:solidFill>
+              </a:rPr>
+              <a:t>6. Townsley DM, Scheinberg P, Winkler T, et al. Eltrombopag added to standard immunosuppression for aplastic anemia. N Engl J Med. 2017;376(16):1540–50.</a:t>
+            </a:r>
+            <a:endParaRPr lang="en-US" sz="1100" dirty="0"/>
+          </a:p>
         </p:txBody>
       </p:sp>
       <p:sp>
         <p:nvSpPr>
-          <p:cNvPr id="6" name="Text 75"/>
+          <p:cNvPr id="6" name="Text 73"/>
           <p:cNvSpPr txBox="1"/>
           <p:nvPr/>
         </p:nvSpPr>
@@ -15629,7 +15447,7 @@
                   <a:schemeClr val="tx1"/>
                 </a:solidFill>
               </a:rPr>
-              <a:t>5. Marsh JC, Gupta V, Lim Z, et al. Alemtuzumab with fludarabine and cyclophosphamide reduces chronic graft-versus-host disease after allogeneic stem cell transplantation for acquired aplastic anemia. Blood. 2011;118(8):2351–7.</a:t>
+              <a:t>7. Peffault de Latour R, Kulasekararaj A, Iacobelli S, et al. Eltrombopag added to immunosuppression in severe aplastic anemia. N Engl J Med. 2022;386(1):11–23.</a:t>
             </a:r>
             <a:endParaRPr lang="en-US" sz="1100" dirty="0"/>
           </a:p>
@@ -15646,7 +15464,7 @@
                   <a:schemeClr val="tx1"/>
                 </a:solidFill>
               </a:rPr>
-              <a:t>6. Townsley DM, Scheinberg P, Winkler T, et al. Eltrombopag added to standard immunosuppression for aplastic anemia. N Engl J Med. 2017;376(16):1540–50.</a:t>
+              <a:t>8. Samarasinghe S, Webb DKH. How I manage aplastic anaemia in children. Br J Haematol. 2012;157(1):26–40.</a:t>
             </a:r>
             <a:endParaRPr lang="en-US" sz="1100" dirty="0"/>
           </a:p>
@@ -15663,7 +15481,58 @@
                   <a:schemeClr val="tx1"/>
                 </a:solidFill>
               </a:rPr>
-              <a:t>7. Peffault de Latour R, Kulasekararaj A, Iacobelli S, et al. Eltrombopag added to immunosuppression in severe aplastic anemia. N Engl J Med. 2022;386(1):11–23.</a:t>
+              <a:t>9. Dufour C, Veys P, Carraro E, et al. Similar outcome of upfront-unrelated and matched sibling stem cell transplantation in idiopathic paediatric aplastic anaemia. A study on behalf of the UK Paediatric BMT Working Party, Paediatric Diseases Working Party and Severe Aplastic Anaemia Working Party of EBMT. Br J Haematol. 2015a;171(4):585–94.</a:t>
+            </a:r>
+            <a:endParaRPr lang="en-US" sz="1100" dirty="0"/>
+          </a:p>
+          <a:p>
+            <a:pPr indent="0" marL="0">
+              <a:spcAft>
+                <a:spcPts val="700"/>
+              </a:spcAft>
+              <a:buNone/>
+            </a:pPr>
+            <a:r>
+              <a:rPr lang="en-US" sz="1100" dirty="0">
+                <a:solidFill>
+                  <a:schemeClr val="tx1"/>
+                </a:solidFill>
+              </a:rPr>
+              <a:t>10. Petit AF, Kulasekararaj AG, Eikema DJ, et al. Upfront unrelated donor hematopoietic stem cell transplantation in patients with idiopathic aplastic anemia: a retrospective study of the Severe Aplastic Anemia Working Party of European Bone Marrow Transplantation. Am J Hematol. 2022;97(1):E1–3.</a:t>
+            </a:r>
+            <a:endParaRPr lang="en-US" sz="1100" dirty="0"/>
+          </a:p>
+          <a:p>
+            <a:pPr indent="0" marL="0">
+              <a:spcAft>
+                <a:spcPts val="700"/>
+              </a:spcAft>
+              <a:buNone/>
+            </a:pPr>
+            <a:r>
+              <a:rPr lang="en-US" sz="1100" dirty="0">
+                <a:solidFill>
+                  <a:schemeClr val="tx1"/>
+                </a:solidFill>
+              </a:rPr>
+              <a:t>11. Pulsipher MA, Lehmann LE, Bertuch AA, et al. A study assessing the feasibility of randomization of pediatric and young adult patients between matched unrelated donor bone marrow transplantation and immune-suppressive therapy for newly diagnosed severe aplastic anemia: a joint pilot trial of the North American Pediatric Aplastic Anemia Consortium and the Pediatric Transplantation and Cellular Therapy Consortium. Pediatr Blood Cancer. 2020;67(10):e28444.</a:t>
+            </a:r>
+            <a:endParaRPr lang="en-US" sz="1100" dirty="0"/>
+          </a:p>
+          <a:p>
+            <a:pPr indent="0" marL="0">
+              <a:spcAft>
+                <a:spcPts val="700"/>
+              </a:spcAft>
+              <a:buNone/>
+            </a:pPr>
+            <a:r>
+              <a:rPr lang="en-US" sz="1100" dirty="0">
+                <a:solidFill>
+                  <a:schemeClr val="tx1"/>
+                </a:solidFill>
+              </a:rPr>
+              <a:t>12. Olnes MJ, Scheinberg P, Calvo KR, et al. Eltrombopag and improved hematopoiesis in refractory aplastic anemia. N Engl J Med. 2012;367(1):11–9.</a:t>
             </a:r>
             <a:endParaRPr lang="en-US" sz="1100" dirty="0"/>
           </a:p>
@@ -15839,7 +15708,7 @@
                   <a:schemeClr val="tx1"/>
                 </a:solidFill>
               </a:rPr>
-              <a:t>References, part 2 of 4</a:t>
+              <a:t>References, part 2 of 2</a:t>
             </a:r>
             <a:endParaRPr lang="en-US" sz="3600" dirty="0"/>
           </a:p>
@@ -15847,7 +15716,7 @@
       </p:sp>
       <p:sp>
         <p:nvSpPr>
-          <p:cNvPr id="5" name="Text 76"/>
+          <p:cNvPr id="5" name="Text 74"/>
           <p:cNvSpPr txBox="1"/>
           <p:nvPr/>
         </p:nvSpPr>
@@ -15878,7 +15747,7 @@
                   <a:schemeClr val="tx1"/>
                 </a:solidFill>
               </a:rPr>
-              <a:t>8. Samarasinghe S, Webb DKH. How I manage aplastic anaemia in children. Br J Haematol. 2012;157(1):26–40.</a:t>
+              <a:t>13. Desmond R, Townsley DM, Dumitriu B, et al. Eltrombopag restores trilineage hematopoiesis in refractory severe aplastic anemia that can be sustained on discontinuation of drug. Blood. 2014;123(12):1818–25.</a:t>
             </a:r>
             <a:endParaRPr lang="en-US" sz="1100" dirty="0"/>
           </a:p>
@@ -15895,7 +15764,7 @@
                   <a:schemeClr val="tx1"/>
                 </a:solidFill>
               </a:rPr>
-              <a:t>9. Dufour C, Veys P, Carraro E, et al. Similar outcome of upfront-unrelated and matched sibling stem cell transplantation in idiopathic paediatric aplastic anaemia. A study on behalf of the UK Paediatric BMT Working Party, Paediatric Diseases Working Party and Severe Aplastic Anaemia Working Party of EBMT. Br J Haematol. 2015a;171(4):585–94.</a:t>
+              <a:t>14. Peffault de Latour R, Chevret S, Jubert C, et al. Unrelated cord blood transplantation in patients with idiopathic refractory severe aplastic anemia: a nationwide phase 2 study. Blood. 2018;132(7):750–4.</a:t>
             </a:r>
             <a:endParaRPr lang="en-US" sz="1100" dirty="0"/>
           </a:p>
@@ -15912,7 +15781,7 @@
                   <a:schemeClr val="tx1"/>
                 </a:solidFill>
               </a:rPr>
-              <a:t>10. Petit AF, Kulasekararaj AG, Eikema DJ, et al. Upfront unrelated donor hematopoietic stem cell transplantation in patients with idiopathic aplastic anemia: a retrospective study of the Severe Aplastic Anemia Working Party of European Bone Marrow Transplantation. Am J Hematol. 2022;97(1):E1–3.</a:t>
+              <a:t>15. DeZern AE, Eapen M, Wu J, et al. Haploidentical bone marrow transplantation in patients with relapsed or refractory severe aplastic anaemia in the USA (BMT CTN 1502): a multicentre, single-arm, phase 2 trial. Lancet Haematol. 2022;9(9):e660–9.</a:t>
             </a:r>
             <a:endParaRPr lang="en-US" sz="1100" dirty="0"/>
           </a:p>
@@ -15929,15 +15798,49 @@
                   <a:schemeClr val="tx1"/>
                 </a:solidFill>
               </a:rPr>
-              <a:t>11. Pulsipher MA, Lehmann LE, Bertuch AA, et al. A study assessing the feasibility of randomization of pediatric and young adult patients between matched unrelated donor bone marrow transplantation and immune-suppressive therapy for newly diagnosed severe aplastic anemia: a joint pilot trial of the North American Pediatric Aplastic Anemia Consortium and the Pediatric Transplantation and Cellular Therapy Consortium. Pediatr Blood Cancer. 2020;67(10):e28444.</a:t>
+              <a:t>16. Prata PH, Eikema DJ, Afansyev B, et al. Haploidentical transplantation and posttransplant cyclophosphamide for treating aplastic anemia patients: a report from the EBMT Severe Aplastic Anemia Working Party. Bone Marrow Transplant. 2020;55(6):1050–8.</a:t>
             </a:r>
             <a:endParaRPr lang="en-US" sz="1100" dirty="0"/>
           </a:p>
+          <a:p>
+            <a:pPr indent="0" marL="0">
+              <a:spcAft>
+                <a:spcPts val="700"/>
+              </a:spcAft>
+              <a:buNone/>
+            </a:pPr>
+            <a:r>
+              <a:rPr lang="en-US" sz="1100" dirty="0">
+                <a:solidFill>
+                  <a:schemeClr val="tx1"/>
+                </a:solidFill>
+              </a:rPr>
+              <a:t>17. DeZern A, Zahurak ML, Symons HJ, et al. Alternative donor BMT with post-transplant cyclophosphamide as initial therapy for acquired severe aplastic anemia. Blood. 2023;141(25):3031–8.</a:t>
+            </a:r>
+            <a:endParaRPr lang="en-US" sz="1100" dirty="0"/>
+          </a:p>
+          <a:p>
+            <a:pPr indent="0" marL="0">
+              <a:spcAft>
+                <a:spcPts val="700"/>
+              </a:spcAft>
+              <a:buNone/>
+            </a:pPr>
+            <a:r>
+              <a:rPr lang="en-US" sz="1100" dirty="0">
+                <a:solidFill>
+                  <a:schemeClr val="tx1"/>
+                </a:solidFill>
+              </a:rPr>
+              <a:t>18. Peffault de Latour R, Schrezenmeier H, Bacigalupo A, et al. Allogeneic stem cell transplantation in paroxysmal nocturnal hemoglobinuria. Haematologica. 2012;97(11):1666–73.</a:t>
+            </a:r>
+            <a:endParaRPr lang="en-US" sz="1100" dirty="0"/>
+          </a:p>
         </p:txBody>
       </p:sp>
       <p:sp>
         <p:nvSpPr>
-          <p:cNvPr id="6" name="Text 77"/>
+          <p:cNvPr id="6" name="Text 75"/>
           <p:cNvSpPr txBox="1"/>
           <p:nvPr/>
         </p:nvSpPr>
@@ -15968,7 +15871,7 @@
                   <a:schemeClr val="tx1"/>
                 </a:solidFill>
               </a:rPr>
-              <a:t>12. Olnes MJ, Scheinberg P, Calvo KR, et al. Eltrombopag and improved hematopoiesis in refractory aplastic anemia. N Engl J Med. 2012;367(1):11–9.</a:t>
+              <a:t>19. Hillmen P, Young NS, Schubert J, et al. The complement inhibitor eculizumab in paroxysmal nocturnal hemoglobinuria. N Engl J Med. 2006;355(12):1233–43.</a:t>
             </a:r>
             <a:endParaRPr lang="en-US" sz="1100" dirty="0"/>
           </a:p>
@@ -15985,7 +15888,7 @@
                   <a:schemeClr val="tx1"/>
                 </a:solidFill>
               </a:rPr>
-              <a:t>13. Desmond R, Townsley DM, Dumitriu B, et al. Eltrombopag restores trilineage hematopoiesis in refractory severe aplastic anemia that can be sustained on discontinuation of drug. Blood. 2014;123(12):1818–25.</a:t>
+              <a:t>20. Lee JW, Sicre de Fontbrune F, Wong Lee Lee L, et al. Ravulizumab (ALXN1210) vs eculizumab in adult patients with PNH naive to complement inhibitors: the 301 study. Blood. 2019;133(6):530–9.</a:t>
             </a:r>
             <a:endParaRPr lang="en-US" sz="1100" dirty="0"/>
           </a:p>
@@ -16002,7 +15905,58 @@
                   <a:schemeClr val="tx1"/>
                 </a:solidFill>
               </a:rPr>
-              <a:t>14. Peffault de Latour R, Chevret S, Jubert C, et al. Unrelated cord blood transplantation in patients with idiopathic refractory severe aplastic anemia: a nationwide phase 2 study. Blood. 2018;132(7):750–4.</a:t>
+              <a:t>21. Kulasekararaj AG, Hill A, Rottinghaus ST, et al. Ravulizumab (ALXN1210) vs eculizumab in C5-inhibitor-experienced adult patients with PNH: the 302 study. Blood. 2019;133(6):540–9.</a:t>
+            </a:r>
+            <a:endParaRPr lang="en-US" sz="1100" dirty="0"/>
+          </a:p>
+          <a:p>
+            <a:pPr indent="0" marL="0">
+              <a:spcAft>
+                <a:spcPts val="700"/>
+              </a:spcAft>
+              <a:buNone/>
+            </a:pPr>
+            <a:r>
+              <a:rPr lang="en-US" sz="1100" dirty="0">
+                <a:solidFill>
+                  <a:schemeClr val="tx1"/>
+                </a:solidFill>
+              </a:rPr>
+              <a:t>22. Hillmen P, Szer J, Weitz I, et al. Pegcetacoplan versus Eculizumab in paroxysmal nocturnal hemoglobinuria. N Engl J Med. 2021;384(11):1028–37.</a:t>
+            </a:r>
+            <a:endParaRPr lang="en-US" sz="1100" dirty="0"/>
+          </a:p>
+          <a:p>
+            <a:pPr indent="0" marL="0">
+              <a:spcAft>
+                <a:spcPts val="700"/>
+              </a:spcAft>
+              <a:buNone/>
+            </a:pPr>
+            <a:r>
+              <a:rPr lang="en-US" sz="1100" dirty="0">
+                <a:solidFill>
+                  <a:schemeClr val="tx1"/>
+                </a:solidFill>
+              </a:rPr>
+              <a:t>23. Risitano AM, Röth A, Soret J, et al. Addition of iptacopan, an oral factor B inhibitor, to eculizumab in patients with paroxysmal nocturnal haemoglobinuria and active haemolysis: an open-label, single-arm, phase 2, proof-of-concept trial. Lancet Haematol. 2021;8(5):e344–54.</a:t>
+            </a:r>
+            <a:endParaRPr lang="en-US" sz="1100" dirty="0"/>
+          </a:p>
+          <a:p>
+            <a:pPr indent="0" marL="0">
+              <a:spcAft>
+                <a:spcPts val="700"/>
+              </a:spcAft>
+              <a:buNone/>
+            </a:pPr>
+            <a:r>
+              <a:rPr lang="en-US" sz="1100" dirty="0">
+                <a:solidFill>
+                  <a:schemeClr val="tx1"/>
+                </a:solidFill>
+              </a:rPr>
+              <a:t>24. Peffault de Latour R, Porcher R, Dalle JH, et al. Allogeneic hematopoietic stem cell transplantation in Fanconi anemia: the European Group for Blood and Marrow Transplantation experience. Blood. 2013;122:4279–86.</a:t>
             </a:r>
             <a:endParaRPr lang="en-US" sz="1100" dirty="0"/>
           </a:p>
@@ -16140,7 +16094,7 @@
                   <a:schemeClr val="tx1"/>
                 </a:solidFill>
               </a:rPr>
-              <a:t>REFERENCES</a:t>
+              <a:t>BACKUP · SAA · FIG. 78.1</a:t>
             </a:r>
             <a:endParaRPr lang="en-US" sz="1100" dirty="0"/>
           </a:p>
@@ -16178,7 +16132,7 @@
                   <a:schemeClr val="tx1"/>
                 </a:solidFill>
               </a:rPr>
-              <a:t>References, part 3 of 4</a:t>
+              <a:t>The Ch. 78 algorithm sets first and second line in one figure</a:t>
             </a:r>
             <a:endParaRPr lang="en-US" sz="3600" dirty="0"/>
           </a:p>
@@ -16186,170 +16140,7 @@
       </p:sp>
       <p:sp>
         <p:nvSpPr>
-          <p:cNvPr id="5" name="Text 78"/>
-          <p:cNvSpPr txBox="1"/>
-          <p:nvPr/>
-        </p:nvSpPr>
-        <p:spPr>
-          <a:xfrm>
-            <a:off x="685800" y="2103120"/>
-            <a:ext cx="5120640" cy="3886200"/>
-          </a:xfrm>
-          <a:prstGeom prst="rect">
-            <a:avLst/>
-          </a:prstGeom>
-          <a:noFill/>
-          <a:ln/>
-        </p:spPr>
-        <p:txBody>
-          <a:bodyPr wrap="square" lIns="0" tIns="0" rIns="0" bIns="0" rtlCol="0" anchor="t"/>
-          <a:lstStyle/>
-          <a:p>
-            <a:pPr indent="0" marL="0">
-              <a:spcAft>
-                <a:spcPts val="700"/>
-              </a:spcAft>
-              <a:buNone/>
-            </a:pPr>
-            <a:r>
-              <a:rPr lang="en-US" sz="1100" dirty="0">
-                <a:solidFill>
-                  <a:schemeClr val="tx1"/>
-                </a:solidFill>
-              </a:rPr>
-              <a:t>15. DeZern AE, Eapen M, Wu J, et al. Haploidentical bone marrow transplantation in patients with relapsed or refractory severe aplastic anaemia in the USA (BMT CTN 1502): a multicentre, single-arm, phase 2 trial. Lancet Haematol. 2022;9(9):e660–9.</a:t>
-            </a:r>
-            <a:endParaRPr lang="en-US" sz="1100" dirty="0"/>
-          </a:p>
-          <a:p>
-            <a:pPr indent="0" marL="0">
-              <a:spcAft>
-                <a:spcPts val="700"/>
-              </a:spcAft>
-              <a:buNone/>
-            </a:pPr>
-            <a:r>
-              <a:rPr lang="en-US" sz="1100" dirty="0">
-                <a:solidFill>
-                  <a:schemeClr val="tx1"/>
-                </a:solidFill>
-              </a:rPr>
-              <a:t>16. Prata PH, Eikema DJ, Afansyev B, et al. Haploidentical transplantation and posttransplant cyclophosphamide for treating aplastic anemia patients: a report from the EBMT Severe Aplastic Anemia Working Party. Bone Marrow Transplant. 2020;55(6):1050–8.</a:t>
-            </a:r>
-            <a:endParaRPr lang="en-US" sz="1100" dirty="0"/>
-          </a:p>
-          <a:p>
-            <a:pPr indent="0" marL="0">
-              <a:spcAft>
-                <a:spcPts val="700"/>
-              </a:spcAft>
-              <a:buNone/>
-            </a:pPr>
-            <a:r>
-              <a:rPr lang="en-US" sz="1100" dirty="0">
-                <a:solidFill>
-                  <a:schemeClr val="tx1"/>
-                </a:solidFill>
-              </a:rPr>
-              <a:t>17. DeZern A, Zahurak ML, Symons HJ, et al. Alternative donor BMT with post-transplant cyclophosphamide as initial therapy for acquired severe aplastic anemia. Blood. 2023;141(25):3031–8.</a:t>
-            </a:r>
-            <a:endParaRPr lang="en-US" sz="1100" dirty="0"/>
-          </a:p>
-          <a:p>
-            <a:pPr indent="0" marL="0">
-              <a:spcAft>
-                <a:spcPts val="700"/>
-              </a:spcAft>
-              <a:buNone/>
-            </a:pPr>
-            <a:r>
-              <a:rPr lang="en-US" sz="1100" dirty="0">
-                <a:solidFill>
-                  <a:schemeClr val="tx1"/>
-                </a:solidFill>
-              </a:rPr>
-              <a:t>18. Peffault de Latour R, Schrezenmeier H, Bacigalupo A, et al. Allogeneic stem cell transplantation in paroxysmal nocturnal hemoglobinuria. Haematologica. 2012;97(11):1666–73.</a:t>
-            </a:r>
-            <a:endParaRPr lang="en-US" sz="1100" dirty="0"/>
-          </a:p>
-        </p:txBody>
-      </p:sp>
-      <p:sp>
-        <p:nvSpPr>
-          <p:cNvPr id="6" name="Text 79"/>
-          <p:cNvSpPr txBox="1"/>
-          <p:nvPr/>
-        </p:nvSpPr>
-        <p:spPr>
-          <a:xfrm>
-            <a:off x="6400800" y="2103120"/>
-            <a:ext cx="5120640" cy="3886200"/>
-          </a:xfrm>
-          <a:prstGeom prst="rect">
-            <a:avLst/>
-          </a:prstGeom>
-          <a:noFill/>
-          <a:ln/>
-        </p:spPr>
-        <p:txBody>
-          <a:bodyPr wrap="square" lIns="0" tIns="0" rIns="0" bIns="0" rtlCol="0" anchor="t"/>
-          <a:lstStyle/>
-          <a:p>
-            <a:pPr indent="0" marL="0">
-              <a:spcAft>
-                <a:spcPts val="700"/>
-              </a:spcAft>
-              <a:buNone/>
-            </a:pPr>
-            <a:r>
-              <a:rPr lang="en-US" sz="1100" dirty="0">
-                <a:solidFill>
-                  <a:schemeClr val="tx1"/>
-                </a:solidFill>
-              </a:rPr>
-              <a:t>19. Hillmen P, Young NS, Schubert J, et al. The complement inhibitor eculizumab in paroxysmal nocturnal hemoglobinuria. N Engl J Med. 2006;355(12):1233–43.</a:t>
-            </a:r>
-            <a:endParaRPr lang="en-US" sz="1100" dirty="0"/>
-          </a:p>
-          <a:p>
-            <a:pPr indent="0" marL="0">
-              <a:spcAft>
-                <a:spcPts val="700"/>
-              </a:spcAft>
-              <a:buNone/>
-            </a:pPr>
-            <a:r>
-              <a:rPr lang="en-US" sz="1100" dirty="0">
-                <a:solidFill>
-                  <a:schemeClr val="tx1"/>
-                </a:solidFill>
-              </a:rPr>
-              <a:t>20. Lee JW, Sicre de Fontbrune F, Wong Lee Lee L, et al. Ravulizumab (ALXN1210) vs eculizumab in adult patients with PNH naive to complement inhibitors: the 301 study. Blood. 2019;133(6):530–9.</a:t>
-            </a:r>
-            <a:endParaRPr lang="en-US" sz="1100" dirty="0"/>
-          </a:p>
-          <a:p>
-            <a:pPr indent="0" marL="0">
-              <a:spcAft>
-                <a:spcPts val="700"/>
-              </a:spcAft>
-              <a:buNone/>
-            </a:pPr>
-            <a:r>
-              <a:rPr lang="en-US" sz="1100" dirty="0">
-                <a:solidFill>
-                  <a:schemeClr val="tx1"/>
-                </a:solidFill>
-              </a:rPr>
-              <a:t>21. Kulasekararaj AG, Hill A, Rottinghaus ST, et al. Ravulizumab (ALXN1210) vs eculizumab in C5-inhibitor-experienced adult patients with PNH: the 302 study. Blood. 2019;133(6):540–9.</a:t>
-            </a:r>
-            <a:endParaRPr lang="en-US" sz="1100" dirty="0"/>
-          </a:p>
-        </p:txBody>
-      </p:sp>
-      <p:sp>
-        <p:nvSpPr>
-          <p:cNvPr id="7" name="Text 0"/>
+          <p:cNvPr id="4" name="Text 0"/>
           <p:cNvSpPr/>
           <p:nvPr>
             <p:ph idx="102" type="body" hasCustomPrompt="1"/>
@@ -16373,7 +16164,75 @@
             <a:pPr algn="l" indent="0" marL="0">
               <a:buNone/>
             </a:pPr>
+            <a:r>
+              <a:rPr lang="en-US" sz="1000" dirty="0">
+                <a:solidFill>
+                  <a:schemeClr val="tx1"/>
+                </a:solidFill>
+              </a:rPr>
+              <a:t>Peffault de Latour R, et al. EBMT Handbook 8th ed. 2024; Ch. 78</a:t>
+            </a:r>
             <a:endParaRPr lang="en-US" sz="1000" dirty="0"/>
+          </a:p>
+        </p:txBody>
+      </p:sp>
+      <p:pic>
+        <p:nvPicPr>
+          <p:cNvPr id="6" name="Figure ch78-fig1" descr="Treatment algorithm of idiopathic aplastic anaemia: HLA-identical sibling and age under 40 to marrow HCT; MUD within 2–3 months and age under 20 to HCT; otherwise hATG + CSA + eltrombopag, then unrelated BMT if young, 10/10 and within the first year, or eltrombopag, repeated IST or alternative donor.">    </p:cNvPr>
+          <p:cNvPicPr>
+            <a:picLocks noChangeAspect="1"/>
+          </p:cNvPicPr>
+          <p:nvPr/>
+        </p:nvPicPr>
+        <p:blipFill>
+          <a:blip r:embed="rId1"/>
+          <a:stretch>
+            <a:fillRect/>
+          </a:stretch>
+        </p:blipFill>
+        <p:spPr>
+          <a:xfrm>
+            <a:off x="685800" y="2148840"/>
+            <a:ext cx="5162258" cy="3749040"/>
+          </a:xfrm>
+          <a:prstGeom prst="rect">
+            <a:avLst/>
+          </a:prstGeom>
+        </p:spPr>
+      </p:pic>
+      <p:sp>
+        <p:nvSpPr>
+          <p:cNvPr id="7" name="Text 76"/>
+          <p:cNvSpPr txBox="1"/>
+          <p:nvPr/>
+        </p:nvSpPr>
+        <p:spPr>
+          <a:xfrm>
+            <a:off x="7825252" y="2240280"/>
+            <a:ext cx="3677900" cy="3657600"/>
+          </a:xfrm>
+          <a:prstGeom prst="rect">
+            <a:avLst/>
+          </a:prstGeom>
+          <a:noFill/>
+          <a:ln/>
+        </p:spPr>
+        <p:txBody>
+          <a:bodyPr wrap="square" lIns="0" tIns="0" rIns="0" bIns="0" rtlCol="0" anchor="t"/>
+          <a:lstStyle/>
+          <a:p>
+            <a:pPr indent="0" marL="0">
+              <a:buNone/>
+            </a:pPr>
+            <a:r>
+              <a:rPr lang="en-US" sz="1600" dirty="0">
+                <a:solidFill>
+                  <a:schemeClr val="tx1"/>
+                </a:solidFill>
+              </a:rPr>
+              <a:t>Fig. 78.1. Treatment algorithm of SAA in 2023</a:t>
+            </a:r>
+            <a:endParaRPr lang="en-US" sz="1600" dirty="0"/>
           </a:p>
         </p:txBody>
       </p:sp>
@@ -16479,7 +16338,7 @@
                   <a:schemeClr val="tx1"/>
                 </a:solidFill>
               </a:rPr>
-              <a:t>REFERENCES</a:t>
+              <a:t>BACKUP · FANCONI ANAEMIA · FIG. 79.1</a:t>
             </a:r>
             <a:endParaRPr lang="en-US" sz="1100" dirty="0"/>
           </a:p>
@@ -16517,7 +16376,7 @@
                   <a:schemeClr val="tx1"/>
                 </a:solidFill>
               </a:rPr>
-              <a:t>References, part 4 of 4</a:t>
+              <a:t>Death and secondary cancer keep rising for 20 years after FA HCT</a:t>
             </a:r>
             <a:endParaRPr lang="en-US" sz="3600" dirty="0"/>
           </a:p>
@@ -16525,102 +16384,7 @@
       </p:sp>
       <p:sp>
         <p:nvSpPr>
-          <p:cNvPr id="5" name="Text 80"/>
-          <p:cNvSpPr txBox="1"/>
-          <p:nvPr/>
-        </p:nvSpPr>
-        <p:spPr>
-          <a:xfrm>
-            <a:off x="685800" y="2103120"/>
-            <a:ext cx="5120640" cy="3886200"/>
-          </a:xfrm>
-          <a:prstGeom prst="rect">
-            <a:avLst/>
-          </a:prstGeom>
-          <a:noFill/>
-          <a:ln/>
-        </p:spPr>
-        <p:txBody>
-          <a:bodyPr wrap="square" lIns="0" tIns="0" rIns="0" bIns="0" rtlCol="0" anchor="t"/>
-          <a:lstStyle/>
-          <a:p>
-            <a:pPr indent="0" marL="0">
-              <a:spcAft>
-                <a:spcPts val="700"/>
-              </a:spcAft>
-              <a:buNone/>
-            </a:pPr>
-            <a:r>
-              <a:rPr lang="en-US" sz="1100" dirty="0">
-                <a:solidFill>
-                  <a:schemeClr val="tx1"/>
-                </a:solidFill>
-              </a:rPr>
-              <a:t>22. Hillmen P, Szer J, Weitz I, et al. Pegcetacoplan versus Eculizumab in paroxysmal nocturnal hemoglobinuria. N Engl J Med. 2021;384(11):1028–37.</a:t>
-            </a:r>
-            <a:endParaRPr lang="en-US" sz="1100" dirty="0"/>
-          </a:p>
-          <a:p>
-            <a:pPr indent="0" marL="0">
-              <a:spcAft>
-                <a:spcPts val="700"/>
-              </a:spcAft>
-              <a:buNone/>
-            </a:pPr>
-            <a:r>
-              <a:rPr lang="en-US" sz="1100" dirty="0">
-                <a:solidFill>
-                  <a:schemeClr val="tx1"/>
-                </a:solidFill>
-              </a:rPr>
-              <a:t>23. Risitano AM, Röth A, Soret J, et al. Addition of iptacopan, an oral factor B inhibitor, to eculizumab in patients with paroxysmal nocturnal haemoglobinuria and active haemolysis: an open-label, single-arm, phase 2, proof-of-concept trial. Lancet Haematol. 2021;8(5):e344–54.</a:t>
-            </a:r>
-            <a:endParaRPr lang="en-US" sz="1100" dirty="0"/>
-          </a:p>
-        </p:txBody>
-      </p:sp>
-      <p:sp>
-        <p:nvSpPr>
-          <p:cNvPr id="6" name="Text 81"/>
-          <p:cNvSpPr txBox="1"/>
-          <p:nvPr/>
-        </p:nvSpPr>
-        <p:spPr>
-          <a:xfrm>
-            <a:off x="6400800" y="2103120"/>
-            <a:ext cx="5120640" cy="3886200"/>
-          </a:xfrm>
-          <a:prstGeom prst="rect">
-            <a:avLst/>
-          </a:prstGeom>
-          <a:noFill/>
-          <a:ln/>
-        </p:spPr>
-        <p:txBody>
-          <a:bodyPr wrap="square" lIns="0" tIns="0" rIns="0" bIns="0" rtlCol="0" anchor="t"/>
-          <a:lstStyle/>
-          <a:p>
-            <a:pPr indent="0" marL="0">
-              <a:spcAft>
-                <a:spcPts val="700"/>
-              </a:spcAft>
-              <a:buNone/>
-            </a:pPr>
-            <a:r>
-              <a:rPr lang="en-US" sz="1100" dirty="0">
-                <a:solidFill>
-                  <a:schemeClr val="tx1"/>
-                </a:solidFill>
-              </a:rPr>
-              <a:t>24. Peffault de Latour R, Porcher R, Dalle JH, et al. Allogeneic hematopoietic stem cell transplantation in Fanconi anemia: the European Group for Blood and Marrow Transplantation experience. Blood. 2013;122:4279–86.</a:t>
-            </a:r>
-            <a:endParaRPr lang="en-US" sz="1100" dirty="0"/>
-          </a:p>
-        </p:txBody>
-      </p:sp>
-      <p:sp>
-        <p:nvSpPr>
-          <p:cNvPr id="7" name="Text 0"/>
+          <p:cNvPr id="4" name="Text 0"/>
           <p:cNvSpPr/>
           <p:nvPr>
             <p:ph idx="102" type="body" hasCustomPrompt="1"/>
@@ -16644,7 +16408,75 @@
             <a:pPr algn="l" indent="0" marL="0">
               <a:buNone/>
             </a:pPr>
+            <a:r>
+              <a:rPr lang="en-US" sz="1000" dirty="0">
+                <a:solidFill>
+                  <a:schemeClr val="tx1"/>
+                </a:solidFill>
+              </a:rPr>
+              <a:t>Diaz-de-Heredia C, et al. EBMT Handbook 8th ed. 2024; Ch. 79</a:t>
+            </a:r>
             <a:endParaRPr lang="en-US" sz="1000" dirty="0"/>
+          </a:p>
+        </p:txBody>
+      </p:sp>
+      <p:pic>
+        <p:nvPicPr>
+          <p:cNvPr id="6" name="Figure ch79-fig1" descr="EBMT cumulative incidence curves of death and secondary malignancy after HCT for Fanconi anaemia over 20 years; 518 patients at risk at year 1, 15 at year 20.">    </p:cNvPr>
+          <p:cNvPicPr>
+            <a:picLocks noChangeAspect="1"/>
+          </p:cNvPicPr>
+          <p:nvPr/>
+        </p:nvPicPr>
+        <p:blipFill>
+          <a:blip r:embed="rId1"/>
+          <a:stretch>
+            <a:fillRect/>
+          </a:stretch>
+        </p:blipFill>
+        <p:spPr>
+          <a:xfrm>
+            <a:off x="685800" y="2148840"/>
+            <a:ext cx="3965270" cy="3749040"/>
+          </a:xfrm>
+          <a:prstGeom prst="rect">
+            <a:avLst/>
+          </a:prstGeom>
+        </p:spPr>
+      </p:pic>
+      <p:sp>
+        <p:nvSpPr>
+          <p:cNvPr id="7" name="Text 77"/>
+          <p:cNvSpPr txBox="1"/>
+          <p:nvPr/>
+        </p:nvSpPr>
+        <p:spPr>
+          <a:xfrm>
+            <a:off x="7825252" y="2240280"/>
+            <a:ext cx="3677900" cy="3657600"/>
+          </a:xfrm>
+          <a:prstGeom prst="rect">
+            <a:avLst/>
+          </a:prstGeom>
+          <a:noFill/>
+          <a:ln/>
+        </p:spPr>
+        <p:txBody>
+          <a:bodyPr wrap="square" lIns="0" tIns="0" rIns="0" bIns="0" rtlCol="0" anchor="t"/>
+          <a:lstStyle/>
+          <a:p>
+            <a:pPr indent="0" marL="0">
+              <a:buNone/>
+            </a:pPr>
+            <a:r>
+              <a:rPr lang="en-US" sz="1600" dirty="0">
+                <a:solidFill>
+                  <a:schemeClr val="tx1"/>
+                </a:solidFill>
+              </a:rPr>
+              <a:t>Fig. 79.1. Fanconi anaemia: probability of death and secondary malignancies post transplant (Peffault de Latour 2013)</a:t>
+            </a:r>
+            <a:endParaRPr lang="en-US" sz="1600" dirty="0"/>
           </a:p>
         </p:txBody>
       </p:sp>
@@ -16750,7 +16582,7 @@
                   <a:schemeClr val="tx1"/>
                 </a:solidFill>
               </a:rPr>
-              <a:t>BACKUP · SAA · FIG. 78.1</a:t>
+              <a:t>BACKUP · MARROW FAILURE · GRAFT THRESHOLDS</a:t>
             </a:r>
             <a:endParaRPr lang="en-US" sz="1100" dirty="0"/>
           </a:p>
@@ -16788,7 +16620,7 @@
                   <a:schemeClr val="tx1"/>
                 </a:solidFill>
               </a:rPr>
-              <a:t>The Ch. 78 algorithm sets first and second line in one figure</a:t>
+              <a:t>Marrow is the preferred graft across acquired and inherited BMF</a:t>
             </a:r>
             <a:endParaRPr lang="en-US" sz="3600" dirty="0"/>
           </a:p>
@@ -16826,494 +16658,6 @@
                   <a:schemeClr val="tx1"/>
                 </a:solidFill>
               </a:rPr>
-              <a:t>Peffault de Latour R, et al. EBMT Handbook 8th ed. 2024; Ch. 78</a:t>
-            </a:r>
-            <a:endParaRPr lang="en-US" sz="1000" dirty="0"/>
-          </a:p>
-        </p:txBody>
-      </p:sp>
-      <p:pic>
-        <p:nvPicPr>
-          <p:cNvPr id="6" name="Figure ch78-fig1" descr="Treatment algorithm of idiopathic aplastic anaemia: HLA-identical sibling and age under 40 to marrow HCT; MUD within 2–3 months and age under 20 to HCT; otherwise hATG + CSA + eltrombopag, then unrelated BMT if young, 10/10 and within the first year, or eltrombopag, repeated IST or alternative donor.">    </p:cNvPr>
-          <p:cNvPicPr>
-            <a:picLocks noChangeAspect="1"/>
-          </p:cNvPicPr>
-          <p:nvPr/>
-        </p:nvPicPr>
-        <p:blipFill>
-          <a:blip r:embed="rId1"/>
-          <a:stretch>
-            <a:fillRect/>
-          </a:stretch>
-        </p:blipFill>
-        <p:spPr>
-          <a:xfrm>
-            <a:off x="685800" y="2148840"/>
-            <a:ext cx="5162258" cy="3749040"/>
-          </a:xfrm>
-          <a:prstGeom prst="rect">
-            <a:avLst/>
-          </a:prstGeom>
-        </p:spPr>
-      </p:pic>
-      <p:sp>
-        <p:nvSpPr>
-          <p:cNvPr id="7" name="Text 82"/>
-          <p:cNvSpPr txBox="1"/>
-          <p:nvPr/>
-        </p:nvSpPr>
-        <p:spPr>
-          <a:xfrm>
-            <a:off x="7825252" y="2240280"/>
-            <a:ext cx="3677900" cy="3657600"/>
-          </a:xfrm>
-          <a:prstGeom prst="rect">
-            <a:avLst/>
-          </a:prstGeom>
-          <a:noFill/>
-          <a:ln/>
-        </p:spPr>
-        <p:txBody>
-          <a:bodyPr wrap="square" lIns="0" tIns="0" rIns="0" bIns="0" rtlCol="0" anchor="t"/>
-          <a:lstStyle/>
-          <a:p>
-            <a:pPr indent="0" marL="0">
-              <a:buNone/>
-            </a:pPr>
-            <a:r>
-              <a:rPr lang="en-US" sz="1600" dirty="0">
-                <a:solidFill>
-                  <a:schemeClr val="tx1"/>
-                </a:solidFill>
-              </a:rPr>
-              <a:t>Fig. 78.1. Treatment algorithm of SAA in 2023</a:t>
-            </a:r>
-            <a:endParaRPr lang="en-US" sz="1600" dirty="0"/>
-          </a:p>
-        </p:txBody>
-      </p:sp>
-      <p:sp>
-        <p:nvSpPr>
-          <p:cNvPr id="25" name="Slide Number Placeholder 0"/>
-          <p:cNvSpPr>
-            <a:spLocks noGrp="1"/>
-          </p:cNvSpPr>
-          <p:nvPr>
-            <p:ph type="sldNum" sz="quarter" idx="4294967295"/>
-          </p:nvPr>
-        </p:nvSpPr>
-        <p:spPr>
-          <a:xfrm>
-            <a:off x="10972800" y="6080760"/>
-            <a:ext cx="530352" cy="274320"/>
-          </a:xfrm>
-          <a:prstGeom prst="rect">
-            <a:avLst/>
-          </a:prstGeom>
-          <a:extLst>
-            <a:ext uri="{C572A759-6A51-4108-AA02-DFA0A04FC94B}">
-              <ma14:wrappingTextBoxFlag xmlns:ma14="http://schemas.microsoft.com/office/mac/drawingml/2011/main" val="0"/>
-            </a:ext>
-          </a:extLst>
-        </p:spPr>
-        <p:txBody>
-          <a:bodyPr/>
-          <a:lstStyle>
-            <a:lvl1pPr>
-              <a:defRPr sz="1000">
-                <a:solidFill>
-                  <a:schemeClr val="tx1"/>
-                </a:solidFill>
-              </a:defRPr>
-            </a:lvl1pPr>
-          </a:lstStyle>
-          <a:p>
-            <a:pPr algn="r"/>
-            <a:fld id="{F7021451-1387-4CA6-816F-3879F97B5CBC}" type="slidenum">
-              <a:rPr b="0" lang="en-US"/>
-              <a:t>27</a:t>
-            </a:fld>
-            <a:endParaRPr lang="en-US"/>
-          </a:p>
-        </p:txBody>
-      </p:sp>
-    </p:spTree>
-  </p:cSld>
-  <p:clrMapOvr>
-    <a:masterClrMapping/>
-  </p:clrMapOvr>
-</p:sld>
-</file>
-
-<file path=ppt/slides/slide28.xml><?xml version="1.0" encoding="utf-8"?>
-<p:sld xmlns:a="http://schemas.openxmlformats.org/drawingml/2006/main" xmlns:r="http://schemas.openxmlformats.org/officeDocument/2006/relationships" xmlns:p="http://schemas.openxmlformats.org/presentationml/2006/main">
-  <p:cSld name="Slide 28">
-    <p:spTree>
-      <p:nvGrpSpPr>
-        <p:cNvPr id="1" name=""/>
-        <p:cNvGrpSpPr/>
-        <p:nvPr/>
-      </p:nvGrpSpPr>
-      <p:grpSpPr>
-        <a:xfrm>
-          <a:off x="0" y="0"/>
-          <a:ext cx="0" cy="0"/>
-          <a:chOff x="0" y="0"/>
-          <a:chExt cx="0" cy="0"/>
-        </a:xfrm>
-      </p:grpSpPr>
-      <p:sp>
-        <p:nvSpPr>
-          <p:cNvPr id="2" name="Text 0"/>
-          <p:cNvSpPr/>
-          <p:nvPr>
-            <p:ph idx="100" type="body" hasCustomPrompt="1"/>
-          </p:nvPr>
-        </p:nvSpPr>
-        <p:spPr>
-          <a:xfrm>
-            <a:off x="685800" y="502920"/>
-            <a:ext cx="10817352" cy="274320"/>
-          </a:xfrm>
-          <a:prstGeom prst="rect">
-            <a:avLst/>
-          </a:prstGeom>
-          <a:noFill/>
-          <a:ln/>
-        </p:spPr>
-        <p:txBody>
-          <a:bodyPr wrap="square" lIns="0" tIns="0" rIns="0" bIns="0" rtlCol="0" anchor="t"/>
-          <a:lstStyle/>
-          <a:p>
-            <a:pPr algn="l" indent="0" marL="0">
-              <a:buNone/>
-            </a:pPr>
-            <a:r>
-              <a:rPr lang="en-US" sz="1100" spc="300" kern="0" dirty="0">
-                <a:solidFill>
-                  <a:schemeClr val="tx1"/>
-                </a:solidFill>
-              </a:rPr>
-              <a:t>BACKUP · FANCONI ANAEMIA · FIG. 79.1</a:t>
-            </a:r>
-            <a:endParaRPr lang="en-US" sz="1100" dirty="0"/>
-          </a:p>
-        </p:txBody>
-      </p:sp>
-      <p:sp>
-        <p:nvSpPr>
-          <p:cNvPr id="3" name="Text 0"/>
-          <p:cNvSpPr/>
-          <p:nvPr>
-            <p:ph idx="101" type="title" hasCustomPrompt="1"/>
-          </p:nvPr>
-        </p:nvSpPr>
-        <p:spPr>
-          <a:xfrm>
-            <a:off x="685800" y="822960"/>
-            <a:ext cx="10817352" cy="1143000"/>
-          </a:xfrm>
-          <a:prstGeom prst="rect">
-            <a:avLst/>
-          </a:prstGeom>
-          <a:noFill/>
-          <a:ln/>
-        </p:spPr>
-        <p:txBody>
-          <a:bodyPr wrap="square" lIns="0" tIns="0" rIns="0" bIns="0" rtlCol="0" anchor="t"/>
-          <a:lstStyle/>
-          <a:p>
-            <a:pPr algn="l" indent="0" marL="0">
-              <a:buNone/>
-            </a:pPr>
-            <a:r>
-              <a:rPr lang="en-US" sz="3600" b="1" dirty="0">
-                <a:solidFill>
-                  <a:schemeClr val="tx1"/>
-                </a:solidFill>
-              </a:rPr>
-              <a:t>Death and secondary cancer keep rising for 20 years after FA HCT</a:t>
-            </a:r>
-            <a:endParaRPr lang="en-US" sz="3600" dirty="0"/>
-          </a:p>
-        </p:txBody>
-      </p:sp>
-      <p:sp>
-        <p:nvSpPr>
-          <p:cNvPr id="4" name="Text 0"/>
-          <p:cNvSpPr/>
-          <p:nvPr>
-            <p:ph idx="102" type="body" hasCustomPrompt="1"/>
-          </p:nvPr>
-        </p:nvSpPr>
-        <p:spPr>
-          <a:xfrm>
-            <a:off x="685800" y="6080760"/>
-            <a:ext cx="9966960" cy="457200"/>
-          </a:xfrm>
-          <a:prstGeom prst="rect">
-            <a:avLst/>
-          </a:prstGeom>
-          <a:noFill/>
-          <a:ln/>
-        </p:spPr>
-        <p:txBody>
-          <a:bodyPr wrap="square" lIns="0" tIns="0" rIns="0" bIns="0" rtlCol="0" anchor="t"/>
-          <a:lstStyle/>
-          <a:p>
-            <a:pPr algn="l" indent="0" marL="0">
-              <a:buNone/>
-            </a:pPr>
-            <a:r>
-              <a:rPr lang="en-US" sz="1000" dirty="0">
-                <a:solidFill>
-                  <a:schemeClr val="tx1"/>
-                </a:solidFill>
-              </a:rPr>
-              <a:t>Diaz-de-Heredia C, et al. EBMT Handbook 8th ed. 2024; Ch. 79</a:t>
-            </a:r>
-            <a:endParaRPr lang="en-US" sz="1000" dirty="0"/>
-          </a:p>
-        </p:txBody>
-      </p:sp>
-      <p:pic>
-        <p:nvPicPr>
-          <p:cNvPr id="6" name="Figure ch79-fig1" descr="EBMT cumulative incidence curves of death and secondary malignancy after HCT for Fanconi anaemia over 20 years; 518 patients at risk at year 1, 15 at year 20.">    </p:cNvPr>
-          <p:cNvPicPr>
-            <a:picLocks noChangeAspect="1"/>
-          </p:cNvPicPr>
-          <p:nvPr/>
-        </p:nvPicPr>
-        <p:blipFill>
-          <a:blip r:embed="rId1"/>
-          <a:stretch>
-            <a:fillRect/>
-          </a:stretch>
-        </p:blipFill>
-        <p:spPr>
-          <a:xfrm>
-            <a:off x="685800" y="2148840"/>
-            <a:ext cx="3965270" cy="3749040"/>
-          </a:xfrm>
-          <a:prstGeom prst="rect">
-            <a:avLst/>
-          </a:prstGeom>
-        </p:spPr>
-      </p:pic>
-      <p:sp>
-        <p:nvSpPr>
-          <p:cNvPr id="7" name="Text 83"/>
-          <p:cNvSpPr txBox="1"/>
-          <p:nvPr/>
-        </p:nvSpPr>
-        <p:spPr>
-          <a:xfrm>
-            <a:off x="7825252" y="2240280"/>
-            <a:ext cx="3677900" cy="3657600"/>
-          </a:xfrm>
-          <a:prstGeom prst="rect">
-            <a:avLst/>
-          </a:prstGeom>
-          <a:noFill/>
-          <a:ln/>
-        </p:spPr>
-        <p:txBody>
-          <a:bodyPr wrap="square" lIns="0" tIns="0" rIns="0" bIns="0" rtlCol="0" anchor="t"/>
-          <a:lstStyle/>
-          <a:p>
-            <a:pPr indent="0" marL="0">
-              <a:buNone/>
-            </a:pPr>
-            <a:r>
-              <a:rPr lang="en-US" sz="1600" dirty="0">
-                <a:solidFill>
-                  <a:schemeClr val="tx1"/>
-                </a:solidFill>
-              </a:rPr>
-              <a:t>Fig. 79.1. Fanconi anaemia: probability of death and secondary malignancies post transplant (Peffault de Latour 2013)</a:t>
-            </a:r>
-            <a:endParaRPr lang="en-US" sz="1600" dirty="0"/>
-          </a:p>
-        </p:txBody>
-      </p:sp>
-      <p:sp>
-        <p:nvSpPr>
-          <p:cNvPr id="25" name="Slide Number Placeholder 0"/>
-          <p:cNvSpPr>
-            <a:spLocks noGrp="1"/>
-          </p:cNvSpPr>
-          <p:nvPr>
-            <p:ph type="sldNum" sz="quarter" idx="4294967295"/>
-          </p:nvPr>
-        </p:nvSpPr>
-        <p:spPr>
-          <a:xfrm>
-            <a:off x="10972800" y="6080760"/>
-            <a:ext cx="530352" cy="274320"/>
-          </a:xfrm>
-          <a:prstGeom prst="rect">
-            <a:avLst/>
-          </a:prstGeom>
-          <a:extLst>
-            <a:ext uri="{C572A759-6A51-4108-AA02-DFA0A04FC94B}">
-              <ma14:wrappingTextBoxFlag xmlns:ma14="http://schemas.microsoft.com/office/mac/drawingml/2011/main" val="0"/>
-            </a:ext>
-          </a:extLst>
-        </p:spPr>
-        <p:txBody>
-          <a:bodyPr/>
-          <a:lstStyle>
-            <a:lvl1pPr>
-              <a:defRPr sz="1000">
-                <a:solidFill>
-                  <a:schemeClr val="tx1"/>
-                </a:solidFill>
-              </a:defRPr>
-            </a:lvl1pPr>
-          </a:lstStyle>
-          <a:p>
-            <a:pPr algn="r"/>
-            <a:fld id="{F7021451-1387-4CA6-816F-3879F97B5CBC}" type="slidenum">
-              <a:rPr b="0" lang="en-US"/>
-              <a:t>28</a:t>
-            </a:fld>
-            <a:endParaRPr lang="en-US"/>
-          </a:p>
-        </p:txBody>
-      </p:sp>
-    </p:spTree>
-  </p:cSld>
-  <p:clrMapOvr>
-    <a:masterClrMapping/>
-  </p:clrMapOvr>
-</p:sld>
-</file>
-
-<file path=ppt/slides/slide29.xml><?xml version="1.0" encoding="utf-8"?>
-<p:sld xmlns:a="http://schemas.openxmlformats.org/drawingml/2006/main" xmlns:r="http://schemas.openxmlformats.org/officeDocument/2006/relationships" xmlns:p="http://schemas.openxmlformats.org/presentationml/2006/main">
-  <p:cSld name="Slide 29">
-    <p:spTree>
-      <p:nvGrpSpPr>
-        <p:cNvPr id="1" name=""/>
-        <p:cNvGrpSpPr/>
-        <p:nvPr/>
-      </p:nvGrpSpPr>
-      <p:grpSpPr>
-        <a:xfrm>
-          <a:off x="0" y="0"/>
-          <a:ext cx="0" cy="0"/>
-          <a:chOff x="0" y="0"/>
-          <a:chExt cx="0" cy="0"/>
-        </a:xfrm>
-      </p:grpSpPr>
-      <p:sp>
-        <p:nvSpPr>
-          <p:cNvPr id="2" name="Text 0"/>
-          <p:cNvSpPr/>
-          <p:nvPr>
-            <p:ph idx="100" type="body" hasCustomPrompt="1"/>
-          </p:nvPr>
-        </p:nvSpPr>
-        <p:spPr>
-          <a:xfrm>
-            <a:off x="685800" y="502920"/>
-            <a:ext cx="10817352" cy="274320"/>
-          </a:xfrm>
-          <a:prstGeom prst="rect">
-            <a:avLst/>
-          </a:prstGeom>
-          <a:noFill/>
-          <a:ln/>
-        </p:spPr>
-        <p:txBody>
-          <a:bodyPr wrap="square" lIns="0" tIns="0" rIns="0" bIns="0" rtlCol="0" anchor="t"/>
-          <a:lstStyle/>
-          <a:p>
-            <a:pPr algn="l" indent="0" marL="0">
-              <a:buNone/>
-            </a:pPr>
-            <a:r>
-              <a:rPr lang="en-US" sz="1100" spc="300" kern="0" dirty="0">
-                <a:solidFill>
-                  <a:schemeClr val="tx1"/>
-                </a:solidFill>
-              </a:rPr>
-              <a:t>BACKUP · MARROW FAILURE · GRAFT THRESHOLDS</a:t>
-            </a:r>
-            <a:endParaRPr lang="en-US" sz="1100" dirty="0"/>
-          </a:p>
-        </p:txBody>
-      </p:sp>
-      <p:sp>
-        <p:nvSpPr>
-          <p:cNvPr id="3" name="Text 0"/>
-          <p:cNvSpPr/>
-          <p:nvPr>
-            <p:ph idx="101" type="title" hasCustomPrompt="1"/>
-          </p:nvPr>
-        </p:nvSpPr>
-        <p:spPr>
-          <a:xfrm>
-            <a:off x="685800" y="822960"/>
-            <a:ext cx="10817352" cy="1143000"/>
-          </a:xfrm>
-          <a:prstGeom prst="rect">
-            <a:avLst/>
-          </a:prstGeom>
-          <a:noFill/>
-          <a:ln/>
-        </p:spPr>
-        <p:txBody>
-          <a:bodyPr wrap="square" lIns="0" tIns="0" rIns="0" bIns="0" rtlCol="0" anchor="t"/>
-          <a:lstStyle/>
-          <a:p>
-            <a:pPr algn="l" indent="0" marL="0">
-              <a:buNone/>
-            </a:pPr>
-            <a:r>
-              <a:rPr lang="en-US" sz="3600" b="1" dirty="0">
-                <a:solidFill>
-                  <a:schemeClr val="tx1"/>
-                </a:solidFill>
-              </a:rPr>
-              <a:t>Marrow is the preferred graft across acquired and inherited BMF</a:t>
-            </a:r>
-            <a:endParaRPr lang="en-US" sz="3600" dirty="0"/>
-          </a:p>
-        </p:txBody>
-      </p:sp>
-      <p:sp>
-        <p:nvSpPr>
-          <p:cNvPr id="4" name="Text 0"/>
-          <p:cNvSpPr/>
-          <p:nvPr>
-            <p:ph idx="102" type="body" hasCustomPrompt="1"/>
-          </p:nvPr>
-        </p:nvSpPr>
-        <p:spPr>
-          <a:xfrm>
-            <a:off x="685800" y="6080760"/>
-            <a:ext cx="9966960" cy="457200"/>
-          </a:xfrm>
-          <a:prstGeom prst="rect">
-            <a:avLst/>
-          </a:prstGeom>
-          <a:noFill/>
-          <a:ln/>
-        </p:spPr>
-        <p:txBody>
-          <a:bodyPr wrap="square" lIns="0" tIns="0" rIns="0" bIns="0" rtlCol="0" anchor="t"/>
-          <a:lstStyle/>
-          <a:p>
-            <a:pPr algn="l" indent="0" marL="0">
-              <a:buNone/>
-            </a:pPr>
-            <a:r>
-              <a:rPr lang="en-US" sz="1000" dirty="0">
-                <a:solidFill>
-                  <a:schemeClr val="tx1"/>
-                </a:solidFill>
-              </a:rPr>
               <a:t>Peffault de Latour R, et al. Ch. 78 · Diaz-de-Heredia C, et al. Ch. 79. EBMT Handbook 8th ed. 2024</a:t>
             </a:r>
             <a:endParaRPr lang="en-US" sz="1000" dirty="0"/>
@@ -17322,7 +16666,7 @@
       </p:sp>
       <p:graphicFrame>
         <p:nvGraphicFramePr>
-          <p:cNvPr id="30" name="Table 84"/>
+          <p:cNvPr id="28" name="Table 78"/>
           <p:cNvGraphicFramePr>
             <a:graphicFrameLocks noGrp="1"/>
           </p:cNvGraphicFramePr>
@@ -18225,13 +17569,13 @@
       </p:graphicFrame>
       <p:sp>
         <p:nvSpPr>
-          <p:cNvPr id="7" name="Text 85"/>
+          <p:cNvPr id="7" name="Text 79"/>
           <p:cNvSpPr txBox="1"/>
           <p:nvPr/>
         </p:nvSpPr>
         <p:spPr>
           <a:xfrm>
-            <a:off x="685800" y="5120640"/>
+            <a:off x="685800" y="4754880"/>
             <a:ext cx="10817352" cy="411480"/>
           </a:xfrm>
           <a:prstGeom prst="rect">
@@ -18298,7 +17642,7 @@
             <a:pPr algn="r"/>
             <a:fld id="{F7021451-1387-4CA6-816F-3879F97B5CBC}" type="slidenum">
               <a:rPr b="0" lang="en-US"/>
-              <a:t>29</a:t>
+              <a:t>27</a:t>
             </a:fld>
             <a:endParaRPr lang="en-US"/>
           </a:p>
@@ -22128,7 +21472,7 @@
                     <a:lnT w="0" cap="flat" cmpd="sng" algn="ctr">
                       <a:noFill/>
                     </a:lnT>
-                    <a:lnB w="19050" cap="flat" cmpd="sng" algn="ctr">
+                    <a:lnB w="6350" cap="flat" cmpd="sng" algn="ctr">
                       <a:solidFill>
                         <a:srgbClr val="000000"/>
                       </a:solidFill>
@@ -22168,7 +21512,7 @@
                     <a:lnT w="0" cap="flat" cmpd="sng" algn="ctr">
                       <a:noFill/>
                     </a:lnT>
-                    <a:lnB w="19050" cap="flat" cmpd="sng" algn="ctr">
+                    <a:lnB w="6350" cap="flat" cmpd="sng" algn="ctr">
                       <a:solidFill>
                         <a:srgbClr val="000000"/>
                       </a:solidFill>
@@ -22208,6 +21552,142 @@
                           </a:solidFill>
                         </a:rPr>
                         <a:t>care drives survival</a:t>
+                      </a:r>
+                      <a:endParaRPr lang="en-US" sz="1500" dirty="0"/>
+                    </a:p>
+                  </a:txBody>
+                  <a:tcPr marL="25400" marR="101600" marT="63500" marB="63500" anchor="ctr">
+                    <a:lnL w="0" cap="flat" cmpd="sng" algn="ctr">
+                      <a:noFill/>
+                    </a:lnL>
+                    <a:lnR w="0" cap="flat" cmpd="sng" algn="ctr">
+                      <a:noFill/>
+                    </a:lnR>
+                    <a:lnT w="0" cap="flat" cmpd="sng" algn="ctr">
+                      <a:noFill/>
+                    </a:lnT>
+                    <a:lnB w="6350" cap="flat" cmpd="sng" algn="ctr">
+                      <a:solidFill>
+                        <a:srgbClr val="000000"/>
+                      </a:solidFill>
+                      <a:prstDash val="solid"/>
+                      <a:round/>
+                      <a:headEnd type="none" w="med" len="med"/>
+                      <a:tailEnd type="none" w="med" len="med"/>
+                    </a:lnB>
+                  </a:tcPr>
+                </a:tc>
+              </a:tr>
+              <a:tr h="0">
+                <a:tc>
+                  <a:txBody>
+                    <a:bodyPr/>
+                    <a:lstStyle/>
+                    <a:p>
+                      <a:pPr indent="0" marL="0">
+                        <a:buNone/>
+                      </a:pPr>
+                      <a:r>
+                        <a:rPr lang="en-US" sz="1500" dirty="0">
+                          <a:solidFill>
+                            <a:schemeClr val="tx1"/>
+                          </a:solidFill>
+                        </a:rPr>
+                        <a:t>Taiwan</a:t>
+                      </a:r>
+                      <a:endParaRPr lang="en-US" sz="1500" dirty="0"/>
+                    </a:p>
+                  </a:txBody>
+                  <a:tcPr marL="25400" marR="101600" marT="63500" marB="63500" anchor="ctr">
+                    <a:lnL w="0" cap="flat" cmpd="sng" algn="ctr">
+                      <a:noFill/>
+                    </a:lnL>
+                    <a:lnR w="0" cap="flat" cmpd="sng" algn="ctr">
+                      <a:noFill/>
+                    </a:lnR>
+                    <a:lnT w="0" cap="flat" cmpd="sng" algn="ctr">
+                      <a:noFill/>
+                    </a:lnT>
+                    <a:lnB w="19050" cap="flat" cmpd="sng" algn="ctr">
+                      <a:solidFill>
+                        <a:srgbClr val="000000"/>
+                      </a:solidFill>
+                      <a:prstDash val="solid"/>
+                      <a:round/>
+                      <a:headEnd type="none" w="med" len="med"/>
+                      <a:tailEnd type="none" w="med" len="med"/>
+                    </a:lnB>
+                  </a:tcPr>
+                </a:tc>
+                <a:tc>
+                  <a:txBody>
+                    <a:bodyPr/>
+                    <a:lstStyle/>
+                    <a:p>
+                      <a:pPr indent="0" marL="0">
+                        <a:buNone/>
+                      </a:pPr>
+                      <a:r>
+                        <a:rPr lang="en-US" sz="1500" dirty="0">
+                          <a:solidFill>
+                            <a:schemeClr val="tx1"/>
+                          </a:solidFill>
+                        </a:rPr>
+                        <a:t>Access and NHI coverage</a:t>
+                      </a:r>
+                      <a:endParaRPr lang="en-US" sz="1500" dirty="0"/>
+                    </a:p>
+                  </a:txBody>
+                  <a:tcPr marL="25400" marR="101600" marT="63500" marB="63500" anchor="ctr">
+                    <a:lnL w="0" cap="flat" cmpd="sng" algn="ctr">
+                      <a:noFill/>
+                    </a:lnL>
+                    <a:lnR w="0" cap="flat" cmpd="sng" algn="ctr">
+                      <a:noFill/>
+                    </a:lnR>
+                    <a:lnT w="0" cap="flat" cmpd="sng" algn="ctr">
+                      <a:noFill/>
+                    </a:lnT>
+                    <a:lnB w="19050" cap="flat" cmpd="sng" algn="ctr">
+                      <a:solidFill>
+                        <a:srgbClr val="000000"/>
+                      </a:solidFill>
+                      <a:prstDash val="solid"/>
+                      <a:round/>
+                      <a:headEnd type="none" w="med" len="med"/>
+                      <a:tailEnd type="none" w="med" len="med"/>
+                    </a:lnB>
+                  </a:tcPr>
+                </a:tc>
+                <a:tc>
+                  <a:txBody>
+                    <a:bodyPr/>
+                    <a:lstStyle/>
+                    <a:p>
+                      <a:pPr indent="0" marL="0">
+                        <a:buNone/>
+                      </a:pPr>
+                      <a:r>
+                        <a:rPr lang="en-US" sz="1500" dirty="0">
+                          <a:solidFill>
+                            <a:schemeClr val="tx1"/>
+                          </a:solidFill>
+                        </a:rPr>
+                        <a:t>[verify: hATG and EPAG</a:t>
+                      </a:r>
+                      <a:endParaRPr lang="en-US" sz="1500" dirty="0"/>
+                    </a:p>
+                    <a:p>
+                      <a:pPr indent="0" marL="0">
+                        <a:buNone/>
+                      </a:pPr>
+                      <a:r>
+                        <a:rPr lang="en-US" sz="1500" dirty="0">
+                          <a:solidFill>
+                            <a:schemeClr val="tx1"/>
+                          </a:solidFill>
+                        </a:rPr>
+                        <a:t>in first-line SAA]</a:t>
                       </a:r>
                       <a:endParaRPr lang="en-US" sz="1500" dirty="0"/>
                     </a:p>
@@ -22238,42 +21718,6 @@
           </a:graphicData>
         </a:graphic>
       </p:graphicFrame>
-      <p:sp>
-        <p:nvSpPr>
-          <p:cNvPr id="7" name="Text 33"/>
-          <p:cNvSpPr txBox="1"/>
-          <p:nvPr/>
-        </p:nvSpPr>
-        <p:spPr>
-          <a:xfrm>
-            <a:off x="685800" y="5440680"/>
-            <a:ext cx="10817352" cy="411480"/>
-          </a:xfrm>
-          <a:prstGeom prst="rect">
-            <a:avLst/>
-          </a:prstGeom>
-          <a:noFill/>
-          <a:ln/>
-        </p:spPr>
-        <p:txBody>
-          <a:bodyPr wrap="square" lIns="0" tIns="0" rIns="0" bIns="0" rtlCol="0" anchor="t"/>
-          <a:lstStyle/>
-          <a:p>
-            <a:pPr indent="0" marL="0">
-              <a:buNone/>
-            </a:pPr>
-            <a:r>
-              <a:rPr lang="en-US" sz="1600" b="1" dirty="0">
-                <a:solidFill>
-                  <a:schemeClr val="tx1"/>
-                </a:solidFill>
-              </a:rPr>
-              <a:t>[verify: horse ATG and eltrombopag availability and reimbursement in Taiwan]</a:t>
-            </a:r>
-            <a:endParaRPr lang="en-US" sz="1600" dirty="0"/>
-          </a:p>
-        </p:txBody>
-      </p:sp>
       <p:sp>
         <p:nvSpPr>
           <p:cNvPr id="25" name="Slide Number Placeholder 0"/>
@@ -22460,7 +21904,7 @@
       </p:sp>
       <p:graphicFrame>
         <p:nvGraphicFramePr>
-          <p:cNvPr id="8" name="Table 34"/>
+          <p:cNvPr id="8" name="Table 33"/>
           <p:cNvGraphicFramePr>
             <a:graphicFrameLocks noGrp="1"/>
           </p:cNvGraphicFramePr>
@@ -23395,13 +22839,13 @@
       </p:graphicFrame>
       <p:sp>
         <p:nvSpPr>
-          <p:cNvPr id="7" name="Text 35"/>
+          <p:cNvPr id="7" name="Text 34"/>
           <p:cNvSpPr txBox="1"/>
           <p:nvPr/>
         </p:nvSpPr>
         <p:spPr>
           <a:xfrm>
-            <a:off x="685800" y="5120640"/>
+            <a:off x="685800" y="5440680"/>
             <a:ext cx="10817352" cy="411480"/>
           </a:xfrm>
           <a:prstGeom prst="rect">
@@ -23615,7 +23059,7 @@
       </p:sp>
       <p:sp>
         <p:nvSpPr>
-          <p:cNvPr id="6" name="Box 36"/>
+          <p:cNvPr id="6" name="Box 35"/>
           <p:cNvSpPr txBox="1"/>
           <p:nvPr/>
         </p:nvSpPr>
@@ -23727,7 +23171,7 @@
       </p:sp>
       <p:sp>
         <p:nvSpPr>
-          <p:cNvPr id="10" name="Text 37"/>
+          <p:cNvPr id="10" name="Text 36"/>
           <p:cNvSpPr txBox="1"/>
           <p:nvPr/>
         </p:nvSpPr>
@@ -23765,7 +23209,7 @@
       </p:sp>
       <p:sp>
         <p:nvSpPr>
-          <p:cNvPr id="11" name="Box 38"/>
+          <p:cNvPr id="11" name="Box 37"/>
           <p:cNvSpPr txBox="1"/>
           <p:nvPr/>
         </p:nvSpPr>
@@ -23831,7 +23275,7 @@
       </p:sp>
       <p:sp>
         <p:nvSpPr>
-          <p:cNvPr id="13" name="Box 39"/>
+          <p:cNvPr id="13" name="Box 38"/>
           <p:cNvSpPr txBox="1"/>
           <p:nvPr/>
         </p:nvSpPr>
@@ -23911,7 +23355,7 @@
       </p:sp>
       <p:sp>
         <p:nvSpPr>
-          <p:cNvPr id="15" name="Text 40"/>
+          <p:cNvPr id="15" name="Text 39"/>
           <p:cNvSpPr txBox="1"/>
           <p:nvPr/>
         </p:nvSpPr>
@@ -23949,7 +23393,7 @@
       </p:sp>
       <p:sp>
         <p:nvSpPr>
-          <p:cNvPr id="16" name="Box 41"/>
+          <p:cNvPr id="16" name="Box 40"/>
           <p:cNvSpPr txBox="1"/>
           <p:nvPr/>
         </p:nvSpPr>
@@ -24015,7 +23459,7 @@
       </p:sp>
       <p:sp>
         <p:nvSpPr>
-          <p:cNvPr id="18" name="Box 42"/>
+          <p:cNvPr id="18" name="Box 41"/>
           <p:cNvSpPr txBox="1"/>
           <p:nvPr/>
         </p:nvSpPr>
@@ -24081,7 +23525,7 @@
       </p:sp>
       <p:sp>
         <p:nvSpPr>
-          <p:cNvPr id="20" name="Text 43"/>
+          <p:cNvPr id="20" name="Text 42"/>
           <p:cNvSpPr txBox="1"/>
           <p:nvPr/>
         </p:nvSpPr>
@@ -24119,7 +23563,7 @@
       </p:sp>
       <p:sp>
         <p:nvSpPr>
-          <p:cNvPr id="21" name="Box 44"/>
+          <p:cNvPr id="21" name="Box 43"/>
           <p:cNvSpPr txBox="1"/>
           <p:nvPr/>
         </p:nvSpPr>
@@ -24199,7 +23643,7 @@
       </p:sp>
       <p:sp>
         <p:nvSpPr>
-          <p:cNvPr id="23" name="Box 45"/>
+          <p:cNvPr id="23" name="Box 44"/>
           <p:cNvSpPr txBox="1"/>
           <p:nvPr/>
         </p:nvSpPr>
@@ -24265,7 +23709,7 @@
       </p:sp>
       <p:sp>
         <p:nvSpPr>
-          <p:cNvPr id="25" name="Text 46"/>
+          <p:cNvPr id="25" name="Text 45"/>
           <p:cNvSpPr txBox="1"/>
           <p:nvPr/>
         </p:nvSpPr>
@@ -24303,7 +23747,7 @@
       </p:sp>
       <p:sp>
         <p:nvSpPr>
-          <p:cNvPr id="26" name="Box 47"/>
+          <p:cNvPr id="26" name="Box 46"/>
           <p:cNvSpPr txBox="1"/>
           <p:nvPr/>
         </p:nvSpPr>
@@ -24369,7 +23813,7 @@
       </p:sp>
       <p:sp>
         <p:nvSpPr>
-          <p:cNvPr id="28" name="Box 48"/>
+          <p:cNvPr id="28" name="Box 47"/>
           <p:cNvSpPr txBox="1"/>
           <p:nvPr/>
         </p:nvSpPr>
@@ -24609,7 +24053,7 @@
       </p:sp>
       <p:graphicFrame>
         <p:nvGraphicFramePr>
-          <p:cNvPr id="10" name="Table 49"/>
+          <p:cNvPr id="10" name="Table 48"/>
           <p:cNvGraphicFramePr>
             <a:graphicFrameLocks noGrp="1"/>
           </p:cNvGraphicFramePr>

--- a/slides/decks/s25-aplastic-anaemia-ibmfs.pptx
+++ b/slides/decks/s25-aplastic-anaemia-ibmfs.pptx
@@ -133,13 +133,13 @@
   <p:extLst>
     <p:ext uri="{521415D9-36F7-43E2-AB2F-B90AF26B5E84}">
       <p14:sectionLst xmlns:p14="http://schemas.microsoft.com/office/powerpoint/2010/main">
-        <p14:section name="Opening" id="{01c96755-5fa0-8026-abeb-da5b4168d3a8}">
+        <p14:section name="Opening" id="{9993e70b-a551-ad6b-942b-59a9ac6e4db4}">
           <p14:sldIdLst>
             <p14:sldId id="256"/>
             <p14:sldId id="257"/>
           </p14:sldIdLst>
         </p14:section>
-        <p14:section name="Aplastic anaemia and PNH" id="{cbcd7406-fa67-86cb-6a62-7e95cbef7159}">
+        <p14:section name="Aplastic anaemia and PNH" id="{f997a17d-03e7-9e19-1b55-b141fa58a571}">
           <p14:sldIdLst>
             <p14:sldId id="258"/>
             <p14:sldId id="259"/>
@@ -152,7 +152,7 @@
             <p14:sldId id="266"/>
           </p14:sldIdLst>
         </p14:section>
-        <p14:section name="Inherited marrow failure" id="{7c95ec64-1713-42aa-bf5e-0a83f885401a}">
+        <p14:section name="Inherited marrow failure" id="{3b0a433c-c992-c056-48b1-5957b4bf2d7b}">
           <p14:sldIdLst>
             <p14:sldId id="267"/>
             <p14:sldId id="268"/>
@@ -161,7 +161,7 @@
             <p14:sldId id="271"/>
           </p14:sldIdLst>
         </p14:section>
-        <p14:section name="Board questions" id="{727ab6d9-15ae-bf40-a641-b9421f57115f}">
+        <p14:section name="Board questions" id="{7a17a08a-3315-a6e9-9cd8-1312e95e6136}">
           <p14:sldIdLst>
             <p14:sldId id="272"/>
             <p14:sldId id="273"/>
@@ -171,13 +171,13 @@
             <p14:sldId id="277"/>
           </p14:sldIdLst>
         </p14:section>
-        <p14:section name="References" id="{f4d0f43d-dcb0-32b6-8905-99811e0b68f5}">
+        <p14:section name="References" id="{64cf9f91-17a7-f2a7-cf1b-d962e6ab56bb}">
           <p14:sldIdLst>
             <p14:sldId id="278"/>
             <p14:sldId id="279"/>
           </p14:sldIdLst>
         </p14:section>
-        <p14:section name="Backup" id="{8bde8198-4f35-d4d8-311a-d9d7fdf58f95}">
+        <p14:section name="Backup" id="{353604fb-e602-a8b1-ed37-52c7635b6c09}">
           <p14:sldIdLst>
             <p14:sldId id="280"/>
             <p14:sldId id="281"/>
@@ -21279,7 +21279,7 @@
                             <a:schemeClr val="tx1"/>
                           </a:solidFill>
                         </a:rPr>
-                        <a:t>68% vs 41%; faster,</a:t>
+                        <a:t>68% vs 41%; faster, more</a:t>
                       </a:r>
                       <a:endParaRPr lang="en-US" sz="1500" dirty="0"/>
                     </a:p>
@@ -21293,129 +21293,7 @@
                             <a:schemeClr val="tx1"/>
                           </a:solidFill>
                         </a:rPr>
-                        <a:t>more transfusion-free</a:t>
-                      </a:r>
-                      <a:endParaRPr lang="en-US" sz="1500" dirty="0"/>
-                    </a:p>
-                  </a:txBody>
-                  <a:tcPr marL="25400" marR="101600" marT="63500" marB="63500" anchor="ctr">
-                    <a:lnL w="0" cap="flat" cmpd="sng" algn="ctr">
-                      <a:noFill/>
-                    </a:lnL>
-                    <a:lnR w="0" cap="flat" cmpd="sng" algn="ctr">
-                      <a:noFill/>
-                    </a:lnR>
-                    <a:lnT w="0" cap="flat" cmpd="sng" algn="ctr">
-                      <a:noFill/>
-                    </a:lnT>
-                    <a:lnB w="6350" cap="flat" cmpd="sng" algn="ctr">
-                      <a:solidFill>
-                        <a:srgbClr val="000000"/>
-                      </a:solidFill>
-                      <a:prstDash val="solid"/>
-                      <a:round/>
-                      <a:headEnd type="none" w="med" len="med"/>
-                      <a:tailEnd type="none" w="med" len="med"/>
-                    </a:lnB>
-                  </a:tcPr>
-                </a:tc>
-              </a:tr>
-              <a:tr h="0">
-                <a:tc>
-                  <a:txBody>
-                    <a:bodyPr/>
-                    <a:lstStyle/>
-                    <a:p>
-                      <a:pPr indent="0" marL="0">
-                        <a:buNone/>
-                      </a:pPr>
-                      <a:r>
-                        <a:rPr lang="en-US" sz="1500" dirty="0">
-                          <a:solidFill>
-                            <a:schemeClr val="tx1"/>
-                          </a:solidFill>
-                        </a:rPr>
-                        <a:t>Same trial</a:t>
-                      </a:r>
-                      <a:endParaRPr lang="en-US" sz="1500" dirty="0"/>
-                    </a:p>
-                  </a:txBody>
-                  <a:tcPr marL="25400" marR="101600" marT="63500" marB="63500" anchor="ctr">
-                    <a:lnL w="0" cap="flat" cmpd="sng" algn="ctr">
-                      <a:noFill/>
-                    </a:lnL>
-                    <a:lnR w="0" cap="flat" cmpd="sng" algn="ctr">
-                      <a:noFill/>
-                    </a:lnR>
-                    <a:lnT w="0" cap="flat" cmpd="sng" algn="ctr">
-                      <a:noFill/>
-                    </a:lnT>
-                    <a:lnB w="6350" cap="flat" cmpd="sng" algn="ctr">
-                      <a:solidFill>
-                        <a:srgbClr val="000000"/>
-                      </a:solidFill>
-                      <a:prstDash val="solid"/>
-                      <a:round/>
-                      <a:headEnd type="none" w="med" len="med"/>
-                      <a:tailEnd type="none" w="med" len="med"/>
-                    </a:lnB>
-                  </a:tcPr>
-                </a:tc>
-                <a:tc>
-                  <a:txBody>
-                    <a:bodyPr/>
-                    <a:lstStyle/>
-                    <a:p>
-                      <a:pPr indent="0" marL="0">
-                        <a:buNone/>
-                      </a:pPr>
-                      <a:r>
-                        <a:rPr lang="en-US" sz="1500" dirty="0">
-                          <a:solidFill>
-                            <a:schemeClr val="tx1"/>
-                          </a:solidFill>
-                        </a:rPr>
-                        <a:t>Safety</a:t>
-                      </a:r>
-                      <a:endParaRPr lang="en-US" sz="1500" dirty="0"/>
-                    </a:p>
-                  </a:txBody>
-                  <a:tcPr marL="25400" marR="101600" marT="63500" marB="63500" anchor="ctr">
-                    <a:lnL w="0" cap="flat" cmpd="sng" algn="ctr">
-                      <a:noFill/>
-                    </a:lnL>
-                    <a:lnR w="0" cap="flat" cmpd="sng" algn="ctr">
-                      <a:noFill/>
-                    </a:lnR>
-                    <a:lnT w="0" cap="flat" cmpd="sng" algn="ctr">
-                      <a:noFill/>
-                    </a:lnT>
-                    <a:lnB w="6350" cap="flat" cmpd="sng" algn="ctr">
-                      <a:solidFill>
-                        <a:srgbClr val="000000"/>
-                      </a:solidFill>
-                      <a:prstDash val="solid"/>
-                      <a:round/>
-                      <a:headEnd type="none" w="med" len="med"/>
-                      <a:tailEnd type="none" w="med" len="med"/>
-                    </a:lnB>
-                  </a:tcPr>
-                </a:tc>
-                <a:tc>
-                  <a:txBody>
-                    <a:bodyPr/>
-                    <a:lstStyle/>
-                    <a:p>
-                      <a:pPr indent="0" marL="0">
-                        <a:buNone/>
-                      </a:pPr>
-                      <a:r>
-                        <a:rPr lang="en-US" sz="1500" dirty="0">
-                          <a:solidFill>
-                            <a:schemeClr val="tx1"/>
-                          </a:solidFill>
-                        </a:rPr>
-                        <a:t>Similar in both arms</a:t>
+                        <a:t>transfusion-free; similar safety</a:t>
                       </a:r>
                       <a:endParaRPr lang="en-US" sz="1500" dirty="0"/>
                     </a:p>

--- a/slides/decks/s25-aplastic-anaemia-ibmfs.pptx
+++ b/slides/decks/s25-aplastic-anaemia-ibmfs.pptx
@@ -133,13 +133,13 @@
   <p:extLst>
     <p:ext uri="{521415D9-36F7-43E2-AB2F-B90AF26B5E84}">
       <p14:sectionLst xmlns:p14="http://schemas.microsoft.com/office/powerpoint/2010/main">
-        <p14:section name="Opening" id="{9993e70b-a551-ad6b-942b-59a9ac6e4db4}">
+        <p14:section name="Opening" id="{59015b47-58f0-7686-55bc-41aa3834deb2}">
           <p14:sldIdLst>
             <p14:sldId id="256"/>
             <p14:sldId id="257"/>
           </p14:sldIdLst>
         </p14:section>
-        <p14:section name="Aplastic anaemia and PNH" id="{f997a17d-03e7-9e19-1b55-b141fa58a571}">
+        <p14:section name="Aplastic anaemia and PNH" id="{f3128240-1e29-a000-7f79-056e6216d9f6}">
           <p14:sldIdLst>
             <p14:sldId id="258"/>
             <p14:sldId id="259"/>
@@ -152,7 +152,7 @@
             <p14:sldId id="266"/>
           </p14:sldIdLst>
         </p14:section>
-        <p14:section name="Inherited marrow failure" id="{3b0a433c-c992-c056-48b1-5957b4bf2d7b}">
+        <p14:section name="Inherited marrow failure" id="{fcd60e24-5dd6-b778-0dc4-7a3f17fcd534}">
           <p14:sldIdLst>
             <p14:sldId id="267"/>
             <p14:sldId id="268"/>
@@ -161,7 +161,7 @@
             <p14:sldId id="271"/>
           </p14:sldIdLst>
         </p14:section>
-        <p14:section name="Board questions" id="{7a17a08a-3315-a6e9-9cd8-1312e95e6136}">
+        <p14:section name="Board questions" id="{519705cb-5b84-36c9-3520-df4d88c1dda3}">
           <p14:sldIdLst>
             <p14:sldId id="272"/>
             <p14:sldId id="273"/>
@@ -171,13 +171,13 @@
             <p14:sldId id="277"/>
           </p14:sldIdLst>
         </p14:section>
-        <p14:section name="References" id="{64cf9f91-17a7-f2a7-cf1b-d962e6ab56bb}">
+        <p14:section name="References" id="{4eef403a-f2e4-8e06-ad4e-d372c844788d}">
           <p14:sldIdLst>
             <p14:sldId id="278"/>
             <p14:sldId id="279"/>
           </p14:sldIdLst>
         </p14:section>
-        <p14:section name="Backup" id="{353604fb-e602-a8b1-ed37-52c7635b6c09}">
+        <p14:section name="Backup" id="{fd7ff4e2-3cb9-2154-fd14-6e7397147cd9}">
           <p14:sldIdLst>
             <p14:sldId id="280"/>
             <p14:sldId id="281"/>
@@ -17575,7 +17575,7 @@
         </p:nvSpPr>
         <p:spPr>
           <a:xfrm>
-            <a:off x="685800" y="4754880"/>
+            <a:off x="685800" y="5029200"/>
             <a:ext cx="10817352" cy="411480"/>
           </a:xfrm>
           <a:prstGeom prst="rect">

--- a/slides/decks/s25-aplastic-anaemia-ibmfs.pptx
+++ b/slides/decks/s25-aplastic-anaemia-ibmfs.pptx
@@ -133,13 +133,13 @@
   <p:extLst>
     <p:ext uri="{521415D9-36F7-43E2-AB2F-B90AF26B5E84}">
       <p14:sectionLst xmlns:p14="http://schemas.microsoft.com/office/powerpoint/2010/main">
-        <p14:section name="Opening" id="{59015b47-58f0-7686-55bc-41aa3834deb2}">
+        <p14:section name="Opening" id="{75da4c00-4925-01e4-78b2-2355ef952a08}">
           <p14:sldIdLst>
             <p14:sldId id="256"/>
             <p14:sldId id="257"/>
           </p14:sldIdLst>
         </p14:section>
-        <p14:section name="Aplastic anaemia and PNH" id="{f3128240-1e29-a000-7f79-056e6216d9f6}">
+        <p14:section name="Aplastic anaemia and PNH" id="{47fa20a6-54b3-8acf-0429-ebf31025827f}">
           <p14:sldIdLst>
             <p14:sldId id="258"/>
             <p14:sldId id="259"/>
@@ -152,7 +152,7 @@
             <p14:sldId id="266"/>
           </p14:sldIdLst>
         </p14:section>
-        <p14:section name="Inherited marrow failure" id="{fcd60e24-5dd6-b778-0dc4-7a3f17fcd534}">
+        <p14:section name="Inherited marrow failure" id="{22f93086-57b9-b257-2e74-5a04a1c2f59a}">
           <p14:sldIdLst>
             <p14:sldId id="267"/>
             <p14:sldId id="268"/>
@@ -161,7 +161,7 @@
             <p14:sldId id="271"/>
           </p14:sldIdLst>
         </p14:section>
-        <p14:section name="Board questions" id="{519705cb-5b84-36c9-3520-df4d88c1dda3}">
+        <p14:section name="Board questions" id="{60bd714d-2d7e-9f08-ee01-560247a8d898}">
           <p14:sldIdLst>
             <p14:sldId id="272"/>
             <p14:sldId id="273"/>
@@ -171,13 +171,13 @@
             <p14:sldId id="277"/>
           </p14:sldIdLst>
         </p14:section>
-        <p14:section name="References" id="{4eef403a-f2e4-8e06-ad4e-d372c844788d}">
+        <p14:section name="References" id="{a953ddb1-cec3-1d2c-6652-13b5b2866b7a}">
           <p14:sldIdLst>
             <p14:sldId id="278"/>
             <p14:sldId id="279"/>
           </p14:sldIdLst>
         </p14:section>
-        <p14:section name="Backup" id="{fd7ff4e2-3cb9-2154-fd14-6e7397147cd9}">
+        <p14:section name="Backup" id="{167f373f-27ba-bcd0-a12e-ea4ea3c71175}">
           <p14:sldIdLst>
             <p14:sldId id="280"/>
             <p14:sldId id="281"/>
@@ -865,7 +865,7 @@
             </a:pPr>
             <a:r>
               <a:rPr lang="en-US" dirty="0"/>
-              <a:t>Anti-C5 擋住的是末端補體，C3 還是會沉積在紅血球上，造成 extravascular hemolysis，所以發展出更上游的抑制劑。Pegcetacoplan 打 C3，phase III 收 eculizumab 治療下血紅素仍低於 10.5 的病人，第 16 週血紅素多升 3.84 g/dL，免輸血 85.4% 比 15.4%；但 LDH 沒有達到 non-inferiority。</a:t>
+              <a:t>Anti-C5 擋住的是末端補體，C3 還是會沉積在紅血球上，造成 extravascular hemolysis，所以發展出更上游的抑制劑。Pegcetacoplan 打 C3，phase III 收 eculizumab 治療下血紅素仍低於 10.5 的病人，治療 16 週時血紅素多升 3.84 g/dL，免輸血 85.4% 比 15.4%；但 LDH 沒有達到 non-inferiority。</a:t>
             </a:r>
           </a:p>
           <a:p>

--- a/slides/decks/s25-aplastic-anaemia-ibmfs.pptx
+++ b/slides/decks/s25-aplastic-anaemia-ibmfs.pptx
@@ -133,13 +133,13 @@
   <p:extLst>
     <p:ext uri="{521415D9-36F7-43E2-AB2F-B90AF26B5E84}">
       <p14:sectionLst xmlns:p14="http://schemas.microsoft.com/office/powerpoint/2010/main">
-        <p14:section name="Opening" id="{75da4c00-4925-01e4-78b2-2355ef952a08}">
+        <p14:section name="Opening" id="{262dc738-7bbe-f3de-b484-4b78549861c6}">
           <p14:sldIdLst>
             <p14:sldId id="256"/>
             <p14:sldId id="257"/>
           </p14:sldIdLst>
         </p14:section>
-        <p14:section name="Aplastic anaemia and PNH" id="{47fa20a6-54b3-8acf-0429-ebf31025827f}">
+        <p14:section name="Aplastic anaemia and PNH" id="{374239c6-1bd7-6949-22fb-537961d0ed4c}">
           <p14:sldIdLst>
             <p14:sldId id="258"/>
             <p14:sldId id="259"/>
@@ -152,7 +152,7 @@
             <p14:sldId id="266"/>
           </p14:sldIdLst>
         </p14:section>
-        <p14:section name="Inherited marrow failure" id="{22f93086-57b9-b257-2e74-5a04a1c2f59a}">
+        <p14:section name="Inherited marrow failure" id="{88f571e2-f0e2-d856-12ee-2c28278e1f50}">
           <p14:sldIdLst>
             <p14:sldId id="267"/>
             <p14:sldId id="268"/>
@@ -161,7 +161,7 @@
             <p14:sldId id="271"/>
           </p14:sldIdLst>
         </p14:section>
-        <p14:section name="Board questions" id="{60bd714d-2d7e-9f08-ee01-560247a8d898}">
+        <p14:section name="Board questions" id="{6d1f246b-dbee-78b6-b689-f82a835280b1}">
           <p14:sldIdLst>
             <p14:sldId id="272"/>
             <p14:sldId id="273"/>
@@ -171,13 +171,13 @@
             <p14:sldId id="277"/>
           </p14:sldIdLst>
         </p14:section>
-        <p14:section name="References" id="{a953ddb1-cec3-1d2c-6652-13b5b2866b7a}">
+        <p14:section name="References" id="{b11f3e7b-a2f2-da42-6a56-497bf2e11118}">
           <p14:sldIdLst>
             <p14:sldId id="278"/>
             <p14:sldId id="279"/>
           </p14:sldIdLst>
         </p14:section>
-        <p14:section name="Backup" id="{167f373f-27ba-bcd0-a12e-ea4ea3c71175}">
+        <p14:section name="Backup" id="{f6bb01ad-3278-c0ff-e5f7-c57ca45e9a3a}">
           <p14:sldIdLst>
             <p14:sldId id="280"/>
             <p14:sldId id="281"/>
